--- a/lessons/3-2/slides.pptx
+++ b/lessons/3-2/slides.pptx
@@ -10684,7 +10684,7 @@
       </p:sp>
       <p:sp>
         <p:nvSpPr>
-          <p:cNvPr id="20" name="Shape 18"/>
+          <p:cNvPr id="20" name="Text 18"/>
           <p:cNvSpPr/>
           <p:nvPr/>
         </p:nvSpPr>
@@ -10705,33 +10705,7 @@
             <a:solidFill>
               <a:srgbClr val="D6DBDF"/>
             </a:solidFill>
-            <a:prstDash val="solid"/>
           </a:ln>
-          <a:effectLst>
-            <a:outerShdw sx="100000" sy="100000" kx="0" ky="0" algn="bl" rotWithShape="0" blurRad="50800" dist="12700" dir="5400000">
-              <a:srgbClr val="1C2E42">
-                <a:alpha val="10000"/>
-              </a:srgbClr>
-            </a:outerShdw>
-          </a:effectLst>
-        </p:spPr>
-      </p:sp>
-      <p:sp>
-        <p:nvSpPr>
-          <p:cNvPr id="21" name="Text 19"/>
-          <p:cNvSpPr/>
-          <p:nvPr/>
-        </p:nvSpPr>
-        <p:spPr>
-          <a:xfrm>
-            <a:off x="685800" y="1481328"/>
-            <a:ext cx="1447800" cy="384048"/>
-          </a:xfrm>
-          <a:prstGeom prst="rect">
-            <a:avLst/>
-          </a:prstGeom>
-          <a:noFill/>
-          <a:ln/>
         </p:spPr>
         <p:txBody>
           <a:bodyPr wrap="square" rtlCol="0" anchor="ctr"/>
@@ -10741,7 +10715,7 @@
               <a:buNone/>
             </a:pPr>
             <a:r>
-              <a:rPr lang="en-US" sz="900" dirty="0">
+              <a:rPr lang="en-US" sz="900" b="1" dirty="0">
                 <a:solidFill>
                   <a:srgbClr val="17324D"/>
                 </a:solidFill>
@@ -10757,7 +10731,7 @@
       </p:sp>
       <p:sp>
         <p:nvSpPr>
-          <p:cNvPr id="22" name="Shape 20"/>
+          <p:cNvPr id="21" name="Text 19"/>
           <p:cNvSpPr/>
           <p:nvPr/>
         </p:nvSpPr>
@@ -10778,33 +10752,7 @@
             <a:solidFill>
               <a:srgbClr val="D6DBDF"/>
             </a:solidFill>
-            <a:prstDash val="solid"/>
           </a:ln>
-          <a:effectLst>
-            <a:outerShdw sx="100000" sy="100000" kx="0" ky="0" algn="bl" rotWithShape="0" blurRad="50800" dist="12700" dir="5400000">
-              <a:srgbClr val="1C2E42">
-                <a:alpha val="10000"/>
-              </a:srgbClr>
-            </a:outerShdw>
-          </a:effectLst>
-        </p:spPr>
-      </p:sp>
-      <p:sp>
-        <p:nvSpPr>
-          <p:cNvPr id="23" name="Text 21"/>
-          <p:cNvSpPr/>
-          <p:nvPr/>
-        </p:nvSpPr>
-        <p:spPr>
-          <a:xfrm>
-            <a:off x="2453640" y="1481328"/>
-            <a:ext cx="1447800" cy="384048"/>
-          </a:xfrm>
-          <a:prstGeom prst="rect">
-            <a:avLst/>
-          </a:prstGeom>
-          <a:noFill/>
-          <a:ln/>
         </p:spPr>
         <p:txBody>
           <a:bodyPr wrap="square" rtlCol="0" anchor="ctr"/>
@@ -10814,7 +10762,7 @@
               <a:buNone/>
             </a:pPr>
             <a:r>
-              <a:rPr lang="en-US" sz="900" dirty="0">
+              <a:rPr lang="en-US" sz="900" b="1" dirty="0">
                 <a:solidFill>
                   <a:srgbClr val="17324D"/>
                 </a:solidFill>
@@ -10830,7 +10778,7 @@
       </p:sp>
       <p:sp>
         <p:nvSpPr>
-          <p:cNvPr id="24" name="Shape 22"/>
+          <p:cNvPr id="22" name="Text 20"/>
           <p:cNvSpPr/>
           <p:nvPr/>
         </p:nvSpPr>
@@ -10851,33 +10799,7 @@
             <a:solidFill>
               <a:srgbClr val="D6DBDF"/>
             </a:solidFill>
-            <a:prstDash val="solid"/>
           </a:ln>
-          <a:effectLst>
-            <a:outerShdw sx="100000" sy="100000" kx="0" ky="0" algn="bl" rotWithShape="0" blurRad="50800" dist="12700" dir="5400000">
-              <a:srgbClr val="1C2E42">
-                <a:alpha val="10000"/>
-              </a:srgbClr>
-            </a:outerShdw>
-          </a:effectLst>
-        </p:spPr>
-      </p:sp>
-      <p:sp>
-        <p:nvSpPr>
-          <p:cNvPr id="25" name="Text 23"/>
-          <p:cNvSpPr/>
-          <p:nvPr/>
-        </p:nvSpPr>
-        <p:spPr>
-          <a:xfrm>
-            <a:off x="4221480" y="1481328"/>
-            <a:ext cx="1447800" cy="384048"/>
-          </a:xfrm>
-          <a:prstGeom prst="rect">
-            <a:avLst/>
-          </a:prstGeom>
-          <a:noFill/>
-          <a:ln/>
         </p:spPr>
         <p:txBody>
           <a:bodyPr wrap="square" rtlCol="0" anchor="ctr"/>
@@ -10887,7 +10809,7 @@
               <a:buNone/>
             </a:pPr>
             <a:r>
-              <a:rPr lang="en-US" sz="900" dirty="0">
+              <a:rPr lang="en-US" sz="900" b="1" dirty="0">
                 <a:solidFill>
                   <a:srgbClr val="17324D"/>
                 </a:solidFill>
@@ -10903,7 +10825,7 @@
       </p:sp>
       <p:sp>
         <p:nvSpPr>
-          <p:cNvPr id="26" name="Shape 24"/>
+          <p:cNvPr id="23" name="Text 21"/>
           <p:cNvSpPr/>
           <p:nvPr/>
         </p:nvSpPr>
@@ -10924,33 +10846,7 @@
             <a:solidFill>
               <a:srgbClr val="D6DBDF"/>
             </a:solidFill>
-            <a:prstDash val="solid"/>
           </a:ln>
-          <a:effectLst>
-            <a:outerShdw sx="100000" sy="100000" kx="0" ky="0" algn="bl" rotWithShape="0" blurRad="50800" dist="12700" dir="5400000">
-              <a:srgbClr val="1C2E42">
-                <a:alpha val="10000"/>
-              </a:srgbClr>
-            </a:outerShdw>
-          </a:effectLst>
-        </p:spPr>
-      </p:sp>
-      <p:sp>
-        <p:nvSpPr>
-          <p:cNvPr id="27" name="Text 25"/>
-          <p:cNvSpPr/>
-          <p:nvPr/>
-        </p:nvSpPr>
-        <p:spPr>
-          <a:xfrm>
-            <a:off x="685800" y="1975104"/>
-            <a:ext cx="1447800" cy="384048"/>
-          </a:xfrm>
-          <a:prstGeom prst="rect">
-            <a:avLst/>
-          </a:prstGeom>
-          <a:noFill/>
-          <a:ln/>
         </p:spPr>
         <p:txBody>
           <a:bodyPr wrap="square" rtlCol="0" anchor="ctr"/>
@@ -10960,7 +10856,7 @@
               <a:buNone/>
             </a:pPr>
             <a:r>
-              <a:rPr lang="en-US" sz="900" dirty="0">
+              <a:rPr lang="en-US" sz="900" b="1" dirty="0">
                 <a:solidFill>
                   <a:srgbClr val="17324D"/>
                 </a:solidFill>
@@ -10976,7 +10872,7 @@
       </p:sp>
       <p:sp>
         <p:nvSpPr>
-          <p:cNvPr id="28" name="Shape 26"/>
+          <p:cNvPr id="24" name="Shape 22"/>
           <p:cNvSpPr/>
           <p:nvPr/>
         </p:nvSpPr>
@@ -11010,7 +10906,7 @@
       </p:sp>
       <p:sp>
         <p:nvSpPr>
-          <p:cNvPr id="29" name="Text 27"/>
+          <p:cNvPr id="25" name="Text 23"/>
           <p:cNvSpPr/>
           <p:nvPr/>
         </p:nvSpPr>
@@ -11051,7 +10947,7 @@
       </p:sp>
       <p:sp>
         <p:nvSpPr>
-          <p:cNvPr id="30" name="Shape 28"/>
+          <p:cNvPr id="26" name="Shape 24"/>
           <p:cNvSpPr/>
           <p:nvPr/>
         </p:nvSpPr>
@@ -11085,7 +10981,7 @@
       </p:sp>
       <p:sp>
         <p:nvSpPr>
-          <p:cNvPr id="31" name="Text 29"/>
+          <p:cNvPr id="27" name="Text 25"/>
           <p:cNvSpPr/>
           <p:nvPr/>
         </p:nvSpPr>
@@ -11126,7 +11022,7 @@
       </p:sp>
       <p:sp>
         <p:nvSpPr>
-          <p:cNvPr id="32" name="Shape 30"/>
+          <p:cNvPr id="28" name="Shape 26"/>
           <p:cNvSpPr/>
           <p:nvPr/>
         </p:nvSpPr>
@@ -11160,7 +11056,7 @@
       </p:sp>
       <p:sp>
         <p:nvSpPr>
-          <p:cNvPr id="33" name="Text 31"/>
+          <p:cNvPr id="29" name="Text 27"/>
           <p:cNvSpPr/>
           <p:nvPr/>
         </p:nvSpPr>
@@ -11201,7 +11097,7 @@
       </p:sp>
       <p:sp>
         <p:nvSpPr>
-          <p:cNvPr id="34" name="Text 32"/>
+          <p:cNvPr id="30" name="Text 28"/>
           <p:cNvSpPr/>
           <p:nvPr/>
         </p:nvSpPr>
@@ -11240,7 +11136,7 @@
       </p:sp>
       <p:sp>
         <p:nvSpPr>
-          <p:cNvPr id="35" name="Shape 33"/>
+          <p:cNvPr id="31" name="Shape 29"/>
           <p:cNvSpPr/>
           <p:nvPr/>
         </p:nvSpPr>
@@ -11263,7 +11159,7 @@
       </p:sp>
       <p:sp>
         <p:nvSpPr>
-          <p:cNvPr id="36" name="Shape 34"/>
+          <p:cNvPr id="32" name="Shape 30"/>
           <p:cNvSpPr/>
           <p:nvPr/>
         </p:nvSpPr>
@@ -11286,7 +11182,7 @@
       </p:sp>
       <p:sp>
         <p:nvSpPr>
-          <p:cNvPr id="37" name="Shape 35"/>
+          <p:cNvPr id="33" name="Shape 31"/>
           <p:cNvSpPr/>
           <p:nvPr/>
         </p:nvSpPr>
@@ -11309,7 +11205,7 @@
       </p:sp>
       <p:sp>
         <p:nvSpPr>
-          <p:cNvPr id="38" name="Shape 36"/>
+          <p:cNvPr id="34" name="Shape 32"/>
           <p:cNvSpPr/>
           <p:nvPr/>
         </p:nvSpPr>
@@ -11332,7 +11228,7 @@
       </p:sp>
       <p:sp>
         <p:nvSpPr>
-          <p:cNvPr id="39" name="Shape 37"/>
+          <p:cNvPr id="35" name="Shape 33"/>
           <p:cNvSpPr/>
           <p:nvPr/>
         </p:nvSpPr>

--- a/lessons/3-2/slides.pptx
+++ b/lessons/3-2/slides.pptx
@@ -2495,7 +2495,7 @@
                 <a:ea typeface="Outfit" pitchFamily="34" charset="-122"/>
                 <a:cs typeface="Outfit" pitchFamily="34" charset="-120"/>
               </a:rPr>
-              <a:t>6.RP.3a</a:t>
+              <a:t>6.AT.3a</a:t>
             </a:r>
             <a:endParaRPr lang="en-US" sz="1000" dirty="0"/>
           </a:p>
@@ -3218,7 +3218,7 @@
                 <a:ea typeface="Outfit" pitchFamily="34" charset="-122"/>
                 <a:cs typeface="Outfit" pitchFamily="34" charset="-120"/>
               </a:rPr>
-              <a:t>6.RP.3a</a:t>
+              <a:t>6.AT.3a</a:t>
             </a:r>
             <a:endParaRPr lang="en-US" sz="900" dirty="0"/>
           </a:p>
@@ -4328,7 +4328,7 @@
                 <a:ea typeface="Outfit" pitchFamily="34" charset="-122"/>
                 <a:cs typeface="Outfit" pitchFamily="34" charset="-120"/>
               </a:rPr>
-              <a:t>6.RP.3a</a:t>
+              <a:t>6.AT.3a</a:t>
             </a:r>
             <a:endParaRPr lang="en-US" sz="900" dirty="0"/>
           </a:p>
@@ -5664,7 +5664,7 @@
                 <a:ea typeface="Outfit" pitchFamily="34" charset="-122"/>
                 <a:cs typeface="Outfit" pitchFamily="34" charset="-120"/>
               </a:rPr>
-              <a:t>6.RP.3a</a:t>
+              <a:t>6.AT.3a</a:t>
             </a:r>
             <a:endParaRPr lang="en-US" sz="900" dirty="0"/>
           </a:p>
@@ -6958,7 +6958,7 @@
                 <a:ea typeface="Outfit" pitchFamily="34" charset="-122"/>
                 <a:cs typeface="Outfit" pitchFamily="34" charset="-120"/>
               </a:rPr>
-              <a:t>6.RP.3a</a:t>
+              <a:t>6.AT.3a</a:t>
             </a:r>
             <a:endParaRPr lang="en-US" sz="900" dirty="0"/>
           </a:p>
@@ -8020,7 +8020,7 @@
                 <a:ea typeface="Outfit" pitchFamily="34" charset="-122"/>
                 <a:cs typeface="Outfit" pitchFamily="34" charset="-120"/>
               </a:rPr>
-              <a:t>6.RP.3a</a:t>
+              <a:t>6.AT.3a</a:t>
             </a:r>
             <a:endParaRPr lang="en-US" sz="900" dirty="0"/>
           </a:p>
@@ -8985,7 +8985,7 @@
                 <a:ea typeface="Outfit" pitchFamily="34" charset="-122"/>
                 <a:cs typeface="Outfit" pitchFamily="34" charset="-120"/>
               </a:rPr>
-              <a:t>6.RP.3a</a:t>
+              <a:t>6.AT.3a</a:t>
             </a:r>
             <a:endParaRPr lang="en-US" sz="900" dirty="0"/>
           </a:p>
@@ -9902,7 +9902,7 @@
                 <a:ea typeface="Outfit" pitchFamily="34" charset="-122"/>
                 <a:cs typeface="Outfit" pitchFamily="34" charset="-120"/>
               </a:rPr>
-              <a:t>6.RP.3a</a:t>
+              <a:t>6.AT.3a</a:t>
             </a:r>
             <a:endParaRPr lang="en-US" sz="900" dirty="0"/>
           </a:p>
@@ -11030,7 +11030,7 @@
                 <a:ea typeface="Outfit" pitchFamily="34" charset="-122"/>
                 <a:cs typeface="Outfit" pitchFamily="34" charset="-120"/>
               </a:rPr>
-              <a:t>6.RP.3a</a:t>
+              <a:t>6.AT.3a</a:t>
             </a:r>
             <a:endParaRPr lang="en-US" sz="900" dirty="0"/>
           </a:p>
@@ -12463,7 +12463,7 @@
                 <a:ea typeface="Outfit" pitchFamily="34" charset="-122"/>
                 <a:cs typeface="Outfit" pitchFamily="34" charset="-120"/>
               </a:rPr>
-              <a:t>6.RP.3a</a:t>
+              <a:t>6.AT.3a</a:t>
             </a:r>
             <a:endParaRPr lang="en-US" sz="900" dirty="0"/>
           </a:p>
@@ -13277,7 +13277,7 @@
                 <a:ea typeface="Outfit" pitchFamily="34" charset="-122"/>
                 <a:cs typeface="Outfit" pitchFamily="34" charset="-120"/>
               </a:rPr>
-              <a:t>6.RP.3a</a:t>
+              <a:t>6.AT.3a</a:t>
             </a:r>
             <a:endParaRPr lang="en-US" sz="900" dirty="0"/>
           </a:p>
@@ -14290,7 +14290,7 @@
                 <a:ea typeface="Outfit" pitchFamily="34" charset="-122"/>
                 <a:cs typeface="Outfit" pitchFamily="34" charset="-120"/>
               </a:rPr>
-              <a:t>6.RP.3a</a:t>
+              <a:t>6.AT.3a</a:t>
             </a:r>
             <a:endParaRPr lang="en-US" sz="900" dirty="0"/>
           </a:p>
@@ -15350,7 +15350,7 @@
                 <a:ea typeface="Outfit" pitchFamily="34" charset="-122"/>
                 <a:cs typeface="Outfit" pitchFamily="34" charset="-120"/>
               </a:rPr>
-              <a:t>6.RP.3a</a:t>
+              <a:t>6.AT.3a</a:t>
             </a:r>
             <a:endParaRPr lang="en-US" sz="900" dirty="0"/>
           </a:p>
@@ -16410,7 +16410,7 @@
                 <a:ea typeface="Outfit" pitchFamily="34" charset="-122"/>
                 <a:cs typeface="Outfit" pitchFamily="34" charset="-120"/>
               </a:rPr>
-              <a:t>6.RP.3a</a:t>
+              <a:t>6.AT.3a</a:t>
             </a:r>
             <a:endParaRPr lang="en-US" sz="900" dirty="0"/>
           </a:p>
@@ -17470,7 +17470,7 @@
                 <a:ea typeface="Outfit" pitchFamily="34" charset="-122"/>
                 <a:cs typeface="Outfit" pitchFamily="34" charset="-120"/>
               </a:rPr>
-              <a:t>6.RP.3a</a:t>
+              <a:t>6.AT.3a</a:t>
             </a:r>
             <a:endParaRPr lang="en-US" sz="900" dirty="0"/>
           </a:p>
@@ -18458,7 +18458,7 @@
                 <a:ea typeface="Outfit" pitchFamily="34" charset="-122"/>
                 <a:cs typeface="Outfit" pitchFamily="34" charset="-120"/>
               </a:rPr>
-              <a:t>6.RP.3a</a:t>
+              <a:t>6.AT.3a</a:t>
             </a:r>
             <a:endParaRPr lang="en-US" sz="900" dirty="0"/>
           </a:p>
@@ -20396,7 +20396,7 @@
                 <a:ea typeface="Outfit" pitchFamily="34" charset="-122"/>
                 <a:cs typeface="Outfit" pitchFamily="34" charset="-120"/>
               </a:rPr>
-              <a:t>6.RP.3a</a:t>
+              <a:t>6.AT.3a</a:t>
             </a:r>
             <a:endParaRPr lang="en-US" sz="900" dirty="0"/>
           </a:p>

--- a/lessons/3-2/slides.pptx
+++ b/lessons/3-2/slides.pptx
@@ -694,7 +694,7 @@
           <a:p>
             <a:r>
               <a:rPr lang="en-US" dirty="0"/>
-              <a:t>Answer key — 2 × 3 = 6 cups of honey (multiply, don't add the scale factor)</a:t>
+              <a:t>Answer key — To find cost per ticket, divide $8 ÷ 12 = $0.67 per ticket (rounded). The student divided tickets by cost instead of cost by tickets.</a:t>
             </a:r>
             <a:endParaRPr lang="en-US" dirty="0"/>
           </a:p>
@@ -2334,7 +2334,7 @@
             <a:avLst/>
           </a:prstGeom>
           <a:solidFill>
-            <a:srgbClr val="C0654A">
+            <a:srgbClr val="B0883B">
               <a:alpha val="35000"/>
             </a:srgbClr>
           </a:solidFill>
@@ -2410,7 +2410,7 @@
                   <a:srgbClr val="000000"/>
                 </a:solidFill>
               </a:rPr>
-              <a:t>👨‍🍳</a:t>
+              <a:t>🕹️</a:t>
             </a:r>
             <a:endParaRPr lang="en-US" sz="4400" dirty="0"/>
           </a:p>
@@ -2452,7 +2452,7 @@
                 <a:ea typeface="Outfit" pitchFamily="34" charset="-122"/>
                 <a:cs typeface="Outfit" pitchFamily="34" charset="-120"/>
               </a:rPr>
-              <a:t>Ratio Tables</a:t>
+              <a:t>Rates and Unit Rates</a:t>
             </a:r>
             <a:endParaRPr lang="en-US" sz="3000" dirty="0"/>
           </a:p>
@@ -2475,7 +2475,7 @@
             </a:avLst>
           </a:prstGeom>
           <a:solidFill>
-            <a:srgbClr val="C0654A"/>
+            <a:srgbClr val="B0883B"/>
           </a:solidFill>
           <a:ln/>
         </p:spPr>
@@ -2495,7 +2495,7 @@
                 <a:ea typeface="Outfit" pitchFamily="34" charset="-122"/>
                 <a:cs typeface="Outfit" pitchFamily="34" charset="-120"/>
               </a:rPr>
-              <a:t>6.AT.3a</a:t>
+              <a:t>6.AT.2</a:t>
             </a:r>
             <a:endParaRPr lang="en-US" sz="1000" dirty="0"/>
           </a:p>
@@ -2534,7 +2534,7 @@
                 <a:ea typeface="Hanken Grotesk" pitchFamily="34" charset="-122"/>
                 <a:cs typeface="Hanken Grotesk" pitchFamily="34" charset="-120"/>
               </a:rPr>
-              <a:t>Unit 3  ·  Lesson 3-2</a:t>
+              <a:t>Unit 4  ·  Lesson 4-1</a:t>
             </a:r>
             <a:endParaRPr lang="en-US" sz="1000" dirty="0"/>
           </a:p>
@@ -2860,7 +2860,7 @@
             <a:r>
               <a:rPr lang="en-US" sz="1100" b="1" dirty="0">
                 <a:solidFill>
-                  <a:srgbClr val="C0654A"/>
+                  <a:srgbClr val="B0883B"/>
                 </a:solidFill>
                 <a:latin typeface="Outfit" pitchFamily="34" charset="0"/>
                 <a:ea typeface="Outfit" pitchFamily="34" charset="-122"/>
@@ -2919,7 +2919,7 @@
                 <a:ea typeface="Hanken Grotesk" pitchFamily="34" charset="-122"/>
                 <a:cs typeface="Hanken Grotesk" pitchFamily="34" charset="-120"/>
               </a:rPr>
-              <a:t>I can use a ratio table to find equivalent ratios.</a:t>
+              <a:t>I can find a unit rate to compare prices and decide the better buy.</a:t>
             </a:r>
             <a:endParaRPr lang="en-US" sz="1100" dirty="0"/>
           </a:p>
@@ -2986,7 +2986,7 @@
             <a:r>
               <a:rPr lang="en-US" sz="1100" b="1" dirty="0">
                 <a:solidFill>
-                  <a:srgbClr val="C0654A"/>
+                  <a:srgbClr val="B0883B"/>
                 </a:solidFill>
                 <a:latin typeface="Outfit" pitchFamily="34" charset="0"/>
                 <a:ea typeface="Outfit" pitchFamily="34" charset="-122"/>
@@ -3045,7 +3045,7 @@
                 <a:ea typeface="Hanken Grotesk" pitchFamily="34" charset="-122"/>
                 <a:cs typeface="Hanken Grotesk" pitchFamily="34" charset="-120"/>
               </a:rPr>
-              <a:t>I can explain my table using the words ratio table, equivalent ratio, scale factor, and pattern.</a:t>
+              <a:t>I can explain my choice using the words rate, unit rate, per, and better buy.</a:t>
             </a:r>
             <a:endParaRPr lang="en-US" sz="1050" dirty="0"/>
           </a:p>
@@ -3198,7 +3198,7 @@
             </a:avLst>
           </a:prstGeom>
           <a:solidFill>
-            <a:srgbClr val="C0654A"/>
+            <a:srgbClr val="B0883B"/>
           </a:solidFill>
           <a:ln/>
         </p:spPr>
@@ -3218,7 +3218,7 @@
                 <a:ea typeface="Outfit" pitchFamily="34" charset="-122"/>
                 <a:cs typeface="Outfit" pitchFamily="34" charset="-120"/>
               </a:rPr>
-              <a:t>6.AT.3a</a:t>
+              <a:t>6.AT.2</a:t>
             </a:r>
             <a:endParaRPr lang="en-US" sz="900" dirty="0"/>
           </a:p>
@@ -3437,7 +3437,7 @@
                 <a:ea typeface="Hanken Grotesk" pitchFamily="34" charset="-122"/>
                 <a:cs typeface="Hanken Grotesk" pitchFamily="34" charset="-120"/>
               </a:rPr>
-              <a:t>Reveal Math Grade 6  ·  Unit 3  ·  Lesson 3-2</a:t>
+              <a:t>Reveal Math Grade 6  ·  Unit 4  ·  Lesson 4-1</a:t>
             </a:r>
             <a:endParaRPr lang="en-US" sz="750" dirty="0"/>
           </a:p>
@@ -3549,7 +3549,7 @@
                 <a:ea typeface="Outfit" pitchFamily="34" charset="-122"/>
                 <a:cs typeface="Outfit" pitchFamily="34" charset="-120"/>
               </a:rPr>
-              <a:t>Chef Reyes's pancake recipe uses 2 cups of mix for every 3 cups of milk. Complete the ratio table to scale the recipe for more students.</a:t>
+              <a:t>Calculate the unit rate (cost per game) for each arcade booth. Divide the total cost by the number of games.</a:t>
             </a:r>
             <a:endParaRPr lang="en-US" sz="1050" dirty="0"/>
           </a:p>
@@ -3803,7 +3803,7 @@
           </a:solidFill>
           <a:ln w="12700">
             <a:solidFill>
-              <a:srgbClr val="C0654A"/>
+              <a:srgbClr val="B0883B"/>
             </a:solidFill>
             <a:prstDash val="solid"/>
           </a:ln>
@@ -3831,7 +3831,7 @@
             <a:avLst/>
           </a:prstGeom>
           <a:solidFill>
-            <a:srgbClr val="C0654A"/>
+            <a:srgbClr val="B0883B"/>
           </a:solidFill>
           <a:ln/>
         </p:spPr>
@@ -3878,7 +3878,7 @@
           </a:solidFill>
           <a:ln w="12700">
             <a:solidFill>
-              <a:srgbClr val="C0654A"/>
+              <a:srgbClr val="B0883B"/>
             </a:solidFill>
             <a:prstDash val="solid"/>
           </a:ln>
@@ -3906,7 +3906,7 @@
             <a:avLst/>
           </a:prstGeom>
           <a:solidFill>
-            <a:srgbClr val="C0654A"/>
+            <a:srgbClr val="B0883B"/>
           </a:solidFill>
           <a:ln/>
         </p:spPr>
@@ -4040,7 +4040,7 @@
                 <a:ea typeface="Hanken Grotesk" pitchFamily="34" charset="-122"/>
                 <a:cs typeface="Hanken Grotesk" pitchFamily="34" charset="-120"/>
               </a:rPr>
-              <a:t>In your pancake ratio table, how did you find each new row from the 2:3 starting row?</a:t>
+              <a:t>How did you find the cost per game (the unit rate) for each booth, and what did you divide?</a:t>
             </a:r>
             <a:endParaRPr lang="en-US" sz="1000" dirty="0"/>
           </a:p>
@@ -4308,7 +4308,7 @@
             </a:avLst>
           </a:prstGeom>
           <a:solidFill>
-            <a:srgbClr val="C0654A"/>
+            <a:srgbClr val="B0883B"/>
           </a:solidFill>
           <a:ln/>
         </p:spPr>
@@ -4328,7 +4328,7 @@
                 <a:ea typeface="Outfit" pitchFamily="34" charset="-122"/>
                 <a:cs typeface="Outfit" pitchFamily="34" charset="-120"/>
               </a:rPr>
-              <a:t>6.AT.3a</a:t>
+              <a:t>6.AT.2</a:t>
             </a:r>
             <a:endParaRPr lang="en-US" sz="900" dirty="0"/>
           </a:p>
@@ -4547,7 +4547,7 @@
                 <a:ea typeface="Hanken Grotesk" pitchFamily="34" charset="-122"/>
                 <a:cs typeface="Hanken Grotesk" pitchFamily="34" charset="-120"/>
               </a:rPr>
-              <a:t>Reveal Math Grade 6  ·  Unit 3  ·  Lesson 3-2</a:t>
+              <a:t>Reveal Math Grade 6  ·  Unit 4  ·  Lesson 4-1</a:t>
             </a:r>
             <a:endParaRPr lang="en-US" sz="750" dirty="0"/>
           </a:p>
@@ -4702,7 +4702,7 @@
                 <a:ea typeface="Outfit" pitchFamily="34" charset="-122"/>
                 <a:cs typeface="Outfit" pitchFamily="34" charset="-120"/>
               </a:rPr>
-              <a:t>Find Devon's Mistake</a:t>
+              <a:t>Find the Rate Error</a:t>
             </a:r>
             <a:endParaRPr lang="en-US" sz="1100" dirty="0"/>
           </a:p>
@@ -4756,11 +4756,11 @@
         <p:spPr>
           <a:xfrm>
             <a:off x="594360" y="1627632"/>
-            <a:ext cx="5166360" cy="1901952"/>
+            <a:ext cx="5166360" cy="1517904"/>
           </a:xfrm>
           <a:prstGeom prst="roundRect">
             <a:avLst>
-              <a:gd name="adj" fmla="val 2404"/>
+              <a:gd name="adj" fmla="val 3012"/>
             </a:avLst>
           </a:prstGeom>
           <a:solidFill>
@@ -4867,7 +4867,7 @@
                 <a:ea typeface="Hanken Grotesk" pitchFamily="34" charset="-122"/>
                 <a:cs typeface="Hanken Grotesk" pitchFamily="34" charset="-120"/>
               </a:rPr>
-              <a:t>Read the problem:  </a:t>
+              <a:t>Find the unit rate: 12 tickets for $8:  </a:t>
             </a:r>
             <a:pPr indent="0" marL="0">
               <a:buNone/>
@@ -4881,7 +4881,7 @@
                 <a:ea typeface="Courier New" pitchFamily="34" charset="-122"/>
                 <a:cs typeface="Courier New" pitchFamily="34" charset="-120"/>
               </a:rPr>
-              <a:t>A recipe uses 5 cups of oats for every 2 cups of honey. Complete the table for 3 batches.</a:t>
+              <a:t>12 tickets for $8</a:t>
             </a:r>
             <a:endParaRPr lang="en-US" sz="950" dirty="0"/>
           </a:p>
@@ -4934,7 +4934,7 @@
                 <a:ea typeface="Hanken Grotesk" pitchFamily="34" charset="-122"/>
                 <a:cs typeface="Hanken Grotesk" pitchFamily="34" charset="-120"/>
               </a:rPr>
-              <a:t>Find the scale factor:  </a:t>
+              <a:t>Set up the division:  </a:t>
             </a:r>
             <a:pPr indent="0" marL="0">
               <a:buNone/>
@@ -4948,7 +4948,7 @@
                 <a:ea typeface="Courier New" pitchFamily="34" charset="-122"/>
                 <a:cs typeface="Courier New" pitchFamily="34" charset="-120"/>
               </a:rPr>
-              <a:t>3 batches → multiply by 3</a:t>
+              <a:t>12 ÷ 8 = 1.5</a:t>
             </a:r>
             <a:endParaRPr lang="en-US" sz="950" dirty="0"/>
           </a:p>
@@ -5001,7 +5001,7 @@
                 <a:ea typeface="Hanken Grotesk" pitchFamily="34" charset="-122"/>
                 <a:cs typeface="Hanken Grotesk" pitchFamily="34" charset="-120"/>
               </a:rPr>
-              <a:t>Scale the oats:  </a:t>
+              <a:t>Write the unit rate:  </a:t>
             </a:r>
             <a:pPr indent="0" marL="0">
               <a:buNone/>
@@ -5015,7 +5015,7 @@
                 <a:ea typeface="Courier New" pitchFamily="34" charset="-122"/>
                 <a:cs typeface="Courier New" pitchFamily="34" charset="-120"/>
               </a:rPr>
-              <a:t>5 × 3 = 15 cups of oats</a:t>
+              <a:t>The unit rate is $1.50 per ticket</a:t>
             </a:r>
             <a:endParaRPr lang="en-US" sz="950" dirty="0"/>
           </a:p>
@@ -5029,8 +5029,8 @@
         </p:nvSpPr>
         <p:spPr>
           <a:xfrm>
-            <a:off x="777240" y="3090672"/>
-            <a:ext cx="4892040" cy="347472"/>
+            <a:off x="594360" y="3282696"/>
+            <a:ext cx="5120640" cy="228600"/>
           </a:xfrm>
           <a:prstGeom prst="rect">
             <a:avLst/>
@@ -5046,7 +5046,7 @@
               <a:buNone/>
             </a:pPr>
             <a:r>
-              <a:rPr lang="en-US" sz="950" b="1" dirty="0">
+              <a:rPr lang="en-US" sz="900" b="1" dirty="0">
                 <a:solidFill>
                   <a:srgbClr val="17324D"/>
                 </a:solidFill>
@@ -5054,73 +5054,6 @@
                 <a:ea typeface="Hanken Grotesk" pitchFamily="34" charset="-122"/>
                 <a:cs typeface="Hanken Grotesk" pitchFamily="34" charset="-120"/>
               </a:rPr>
-              <a:t>4. </a:t>
-            </a:r>
-            <a:pPr indent="0" marL="0">
-              <a:buNone/>
-            </a:pPr>
-            <a:r>
-              <a:rPr lang="en-US" sz="950" b="1" dirty="0">
-                <a:solidFill>
-                  <a:srgbClr val="17324D"/>
-                </a:solidFill>
-                <a:latin typeface="Hanken Grotesk" pitchFamily="34" charset="0"/>
-                <a:ea typeface="Hanken Grotesk" pitchFamily="34" charset="-122"/>
-                <a:cs typeface="Hanken Grotesk" pitchFamily="34" charset="-120"/>
-              </a:rPr>
-              <a:t>Scale the honey:  </a:t>
-            </a:r>
-            <a:pPr indent="0" marL="0">
-              <a:buNone/>
-            </a:pPr>
-            <a:r>
-              <a:rPr lang="en-US" sz="950" b="1" dirty="0">
-                <a:solidFill>
-                  <a:srgbClr val="24323F"/>
-                </a:solidFill>
-                <a:latin typeface="Courier New" pitchFamily="34" charset="0"/>
-                <a:ea typeface="Courier New" pitchFamily="34" charset="-122"/>
-                <a:cs typeface="Courier New" pitchFamily="34" charset="-120"/>
-              </a:rPr>
-              <a:t>2 + 3 = 5 cups of honey</a:t>
-            </a:r>
-            <a:endParaRPr lang="en-US" sz="950" dirty="0"/>
-          </a:p>
-        </p:txBody>
-      </p:sp>
-      <p:sp>
-        <p:nvSpPr>
-          <p:cNvPr id="27" name="Text 25"/>
-          <p:cNvSpPr/>
-          <p:nvPr/>
-        </p:nvSpPr>
-        <p:spPr>
-          <a:xfrm>
-            <a:off x="594360" y="3666744"/>
-            <a:ext cx="5120640" cy="228600"/>
-          </a:xfrm>
-          <a:prstGeom prst="rect">
-            <a:avLst/>
-          </a:prstGeom>
-          <a:noFill/>
-          <a:ln/>
-        </p:spPr>
-        <p:txBody>
-          <a:bodyPr wrap="square" rtlCol="0" anchor="ctr"/>
-          <a:lstStyle/>
-          <a:p>
-            <a:pPr indent="0" marL="0">
-              <a:buNone/>
-            </a:pPr>
-            <a:r>
-              <a:rPr lang="en-US" sz="900" b="1" dirty="0">
-                <a:solidFill>
-                  <a:srgbClr val="17324D"/>
-                </a:solidFill>
-                <a:latin typeface="Hanken Grotesk" pitchFamily="34" charset="0"/>
-                <a:ea typeface="Hanken Grotesk" pitchFamily="34" charset="-122"/>
-                <a:cs typeface="Hanken Grotesk" pitchFamily="34" charset="-120"/>
-              </a:rPr>
               <a:t>Which step has the error? Circle it above.</a:t>
             </a:r>
             <a:endParaRPr lang="en-US" sz="900" dirty="0"/>
@@ -5129,7 +5062,7 @@
       </p:sp>
       <p:sp>
         <p:nvSpPr>
-          <p:cNvPr id="28" name="Shape 26"/>
+          <p:cNvPr id="27" name="Shape 25"/>
           <p:cNvSpPr/>
           <p:nvPr/>
         </p:nvSpPr>
@@ -5163,7 +5096,7 @@
       </p:sp>
       <p:sp>
         <p:nvSpPr>
-          <p:cNvPr id="29" name="Text 27"/>
+          <p:cNvPr id="28" name="Text 26"/>
           <p:cNvSpPr/>
           <p:nvPr/>
         </p:nvSpPr>
@@ -5204,7 +5137,7 @@
       </p:sp>
       <p:sp>
         <p:nvSpPr>
-          <p:cNvPr id="30" name="Text 28"/>
+          <p:cNvPr id="29" name="Text 27"/>
           <p:cNvSpPr/>
           <p:nvPr/>
         </p:nvSpPr>
@@ -5299,7 +5232,7 @@
       </p:sp>
       <p:sp>
         <p:nvSpPr>
-          <p:cNvPr id="31" name="Shape 29"/>
+          <p:cNvPr id="30" name="Shape 28"/>
           <p:cNvSpPr/>
           <p:nvPr/>
         </p:nvSpPr>
@@ -5322,7 +5255,7 @@
       </p:sp>
       <p:sp>
         <p:nvSpPr>
-          <p:cNvPr id="32" name="Shape 30"/>
+          <p:cNvPr id="31" name="Shape 29"/>
           <p:cNvSpPr/>
           <p:nvPr/>
         </p:nvSpPr>
@@ -5345,7 +5278,7 @@
       </p:sp>
       <p:sp>
         <p:nvSpPr>
-          <p:cNvPr id="33" name="Shape 31"/>
+          <p:cNvPr id="32" name="Shape 30"/>
           <p:cNvSpPr/>
           <p:nvPr/>
         </p:nvSpPr>
@@ -5368,7 +5301,7 @@
       </p:sp>
       <p:sp>
         <p:nvSpPr>
-          <p:cNvPr id="34" name="Text 32"/>
+          <p:cNvPr id="33" name="Text 31"/>
           <p:cNvSpPr/>
           <p:nvPr/>
         </p:nvSpPr>
@@ -5407,7 +5340,7 @@
       </p:sp>
       <p:sp>
         <p:nvSpPr>
-          <p:cNvPr id="35" name="Shape 33"/>
+          <p:cNvPr id="34" name="Shape 32"/>
           <p:cNvSpPr/>
           <p:nvPr/>
         </p:nvSpPr>
@@ -5430,7 +5363,7 @@
       </p:sp>
       <p:sp>
         <p:nvSpPr>
-          <p:cNvPr id="36" name="Shape 34"/>
+          <p:cNvPr id="35" name="Shape 33"/>
           <p:cNvSpPr/>
           <p:nvPr/>
         </p:nvSpPr>
@@ -5453,7 +5386,7 @@
       </p:sp>
       <p:sp>
         <p:nvSpPr>
-          <p:cNvPr id="37" name="Shape 35"/>
+          <p:cNvPr id="36" name="Shape 34"/>
           <p:cNvSpPr/>
           <p:nvPr/>
         </p:nvSpPr>
@@ -5476,7 +5409,7 @@
       </p:sp>
       <p:sp>
         <p:nvSpPr>
-          <p:cNvPr id="38" name="Shape 36"/>
+          <p:cNvPr id="37" name="Shape 35"/>
           <p:cNvSpPr/>
           <p:nvPr/>
         </p:nvSpPr>
@@ -5644,7 +5577,7 @@
             </a:avLst>
           </a:prstGeom>
           <a:solidFill>
-            <a:srgbClr val="C0654A"/>
+            <a:srgbClr val="B0883B"/>
           </a:solidFill>
           <a:ln/>
         </p:spPr>
@@ -5664,7 +5597,7 @@
                 <a:ea typeface="Outfit" pitchFamily="34" charset="-122"/>
                 <a:cs typeface="Outfit" pitchFamily="34" charset="-120"/>
               </a:rPr>
-              <a:t>6.AT.3a</a:t>
+              <a:t>6.AT.2</a:t>
             </a:r>
             <a:endParaRPr lang="en-US" sz="900" dirty="0"/>
           </a:p>
@@ -5883,7 +5816,7 @@
                 <a:ea typeface="Hanken Grotesk" pitchFamily="34" charset="-122"/>
                 <a:cs typeface="Hanken Grotesk" pitchFamily="34" charset="-120"/>
               </a:rPr>
-              <a:t>Reveal Math Grade 6  ·  Unit 3  ·  Lesson 3-2</a:t>
+              <a:t>Reveal Math Grade 6  ·  Unit 4  ·  Lesson 4-1</a:t>
             </a:r>
             <a:endParaRPr lang="en-US" sz="750" dirty="0"/>
           </a:p>
@@ -6018,7 +5951,7 @@
             <a:avLst/>
           </a:prstGeom>
           <a:solidFill>
-            <a:srgbClr val="C0654A"/>
+            <a:srgbClr val="B0883B"/>
           </a:solidFill>
           <a:ln/>
         </p:spPr>
@@ -6095,7 +6028,7 @@
                 <a:ea typeface="Hanken Grotesk" pitchFamily="34" charset="-122"/>
                 <a:cs typeface="Hanken Grotesk" pitchFamily="34" charset="-120"/>
               </a:rPr>
-              <a:t>The pancake recipe is 2 cups of mix for every 3 cups of milk, so the ratio is 2:3.</a:t>
+              <a:t>Booth A charges $3 for 5 games. I want the cost for just 1 game.</a:t>
             </a:r>
             <a:endParaRPr lang="en-US" sz="1050" dirty="0"/>
           </a:p>
@@ -6116,7 +6049,7 @@
             <a:avLst/>
           </a:prstGeom>
           <a:solidFill>
-            <a:srgbClr val="C0654A"/>
+            <a:srgbClr val="B0883B"/>
           </a:solidFill>
           <a:ln/>
         </p:spPr>
@@ -6193,7 +6126,7 @@
                 <a:ea typeface="Hanken Grotesk" pitchFamily="34" charset="-122"/>
                 <a:cs typeface="Hanken Grotesk" pitchFamily="34" charset="-120"/>
               </a:rPr>
-              <a:t>To make 2 batches, my scale factor is 2.</a:t>
+              <a:t>I divide the cost by the games: $3 ÷ 5 = $0.60.</a:t>
             </a:r>
             <a:endParaRPr lang="en-US" sz="1050" dirty="0"/>
           </a:p>
@@ -6214,7 +6147,7 @@
             <a:avLst/>
           </a:prstGeom>
           <a:solidFill>
-            <a:srgbClr val="C0654A"/>
+            <a:srgbClr val="B0883B"/>
           </a:solidFill>
           <a:ln/>
         </p:spPr>
@@ -6291,7 +6224,7 @@
                 <a:ea typeface="Hanken Grotesk" pitchFamily="34" charset="-122"/>
                 <a:cs typeface="Hanken Grotesk" pitchFamily="34" charset="-120"/>
               </a:rPr>
-              <a:t>I multiply both numbers by 2: 2 x 2 = 4 cups of mix, and 3 x 2 = 6 cups of milk.</a:t>
+              <a:t>So Booth A costs $0.60 per game. That is the unit rate.</a:t>
             </a:r>
             <a:endParaRPr lang="en-US" sz="1050" dirty="0"/>
           </a:p>
@@ -6312,7 +6245,7 @@
             <a:avLst/>
           </a:prstGeom>
           <a:solidFill>
-            <a:srgbClr val="C0654A"/>
+            <a:srgbClr val="B0883B"/>
           </a:solidFill>
           <a:ln/>
         </p:spPr>
@@ -6389,7 +6322,7 @@
                 <a:ea typeface="Hanken Grotesk" pitchFamily="34" charset="-122"/>
                 <a:cs typeface="Hanken Grotesk" pitchFamily="34" charset="-120"/>
               </a:rPr>
-              <a:t>Now my row is 4:6, which is the same ratio as 2:3.</a:t>
+              <a:t>Now I can compare this booth fairly with any other booth.</a:t>
             </a:r>
             <a:endParaRPr lang="en-US" sz="1050" dirty="0"/>
           </a:p>
@@ -6398,104 +6331,6 @@
       <p:sp>
         <p:nvSpPr>
           <p:cNvPr id="31" name="Shape 29"/>
-          <p:cNvSpPr/>
-          <p:nvPr/>
-        </p:nvSpPr>
-        <p:spPr>
-          <a:xfrm>
-            <a:off x="594360" y="3145536"/>
-            <a:ext cx="274320" cy="274320"/>
-          </a:xfrm>
-          <a:prstGeom prst="ellipse">
-            <a:avLst/>
-          </a:prstGeom>
-          <a:solidFill>
-            <a:srgbClr val="C0654A"/>
-          </a:solidFill>
-          <a:ln/>
-        </p:spPr>
-      </p:sp>
-      <p:sp>
-        <p:nvSpPr>
-          <p:cNvPr id="32" name="Text 30"/>
-          <p:cNvSpPr/>
-          <p:nvPr/>
-        </p:nvSpPr>
-        <p:spPr>
-          <a:xfrm>
-            <a:off x="594360" y="3145536"/>
-            <a:ext cx="274320" cy="274320"/>
-          </a:xfrm>
-          <a:prstGeom prst="rect">
-            <a:avLst/>
-          </a:prstGeom>
-          <a:noFill/>
-          <a:ln/>
-        </p:spPr>
-        <p:txBody>
-          <a:bodyPr wrap="square" rtlCol="0" anchor="ctr"/>
-          <a:lstStyle/>
-          <a:p>
-            <a:pPr algn="ctr" indent="0" marL="0">
-              <a:buNone/>
-            </a:pPr>
-            <a:r>
-              <a:rPr lang="en-US" sz="1100" b="1" dirty="0">
-                <a:solidFill>
-                  <a:srgbClr val="FFFFFF"/>
-                </a:solidFill>
-                <a:latin typeface="Outfit" pitchFamily="34" charset="0"/>
-                <a:ea typeface="Outfit" pitchFamily="34" charset="-122"/>
-                <a:cs typeface="Outfit" pitchFamily="34" charset="-120"/>
-              </a:rPr>
-              <a:t>5</a:t>
-            </a:r>
-            <a:endParaRPr lang="en-US" sz="1100" dirty="0"/>
-          </a:p>
-        </p:txBody>
-      </p:sp>
-      <p:sp>
-        <p:nvSpPr>
-          <p:cNvPr id="33" name="Text 31"/>
-          <p:cNvSpPr/>
-          <p:nvPr/>
-        </p:nvSpPr>
-        <p:spPr>
-          <a:xfrm>
-            <a:off x="978408" y="3090672"/>
-            <a:ext cx="3456432" cy="420624"/>
-          </a:xfrm>
-          <a:prstGeom prst="rect">
-            <a:avLst/>
-          </a:prstGeom>
-          <a:noFill/>
-          <a:ln/>
-        </p:spPr>
-        <p:txBody>
-          <a:bodyPr wrap="square" rtlCol="0" anchor="ctr"/>
-          <a:lstStyle/>
-          <a:p>
-            <a:pPr indent="0" marL="0">
-              <a:buNone/>
-            </a:pPr>
-            <a:r>
-              <a:rPr lang="en-US" sz="1050" dirty="0">
-                <a:solidFill>
-                  <a:srgbClr val="24323F"/>
-                </a:solidFill>
-                <a:latin typeface="Hanken Grotesk" pitchFamily="34" charset="0"/>
-                <a:ea typeface="Hanken Grotesk" pitchFamily="34" charset="-122"/>
-                <a:cs typeface="Hanken Grotesk" pitchFamily="34" charset="-120"/>
-              </a:rPr>
-              <a:t>I do NOT add 2 to each number; I multiply both by the same factor.</a:t>
-            </a:r>
-            <a:endParaRPr lang="en-US" sz="1050" dirty="0"/>
-          </a:p>
-        </p:txBody>
-      </p:sp>
-      <p:sp>
-        <p:nvSpPr>
-          <p:cNvPr id="34" name="Shape 32"/>
           <p:cNvSpPr/>
           <p:nvPr/>
         </p:nvSpPr>
@@ -6529,7 +6364,7 @@
       </p:sp>
       <p:sp>
         <p:nvSpPr>
-          <p:cNvPr id="35" name="Text 33"/>
+          <p:cNvPr id="32" name="Text 30"/>
           <p:cNvSpPr/>
           <p:nvPr/>
         </p:nvSpPr>
@@ -6570,7 +6405,7 @@
       </p:sp>
       <p:sp>
         <p:nvSpPr>
-          <p:cNvPr id="36" name="Text 34"/>
+          <p:cNvPr id="33" name="Text 31"/>
           <p:cNvSpPr/>
           <p:nvPr/>
         </p:nvSpPr>
@@ -6609,7 +6444,7 @@
       </p:sp>
       <p:sp>
         <p:nvSpPr>
-          <p:cNvPr id="37" name="Shape 35"/>
+          <p:cNvPr id="34" name="Shape 32"/>
           <p:cNvSpPr/>
           <p:nvPr/>
         </p:nvSpPr>
@@ -6632,7 +6467,7 @@
       </p:sp>
       <p:sp>
         <p:nvSpPr>
-          <p:cNvPr id="38" name="Shape 36"/>
+          <p:cNvPr id="35" name="Shape 33"/>
           <p:cNvSpPr/>
           <p:nvPr/>
         </p:nvSpPr>
@@ -6655,7 +6490,7 @@
       </p:sp>
       <p:sp>
         <p:nvSpPr>
-          <p:cNvPr id="39" name="Shape 37"/>
+          <p:cNvPr id="36" name="Shape 34"/>
           <p:cNvSpPr/>
           <p:nvPr/>
         </p:nvSpPr>
@@ -6678,7 +6513,7 @@
       </p:sp>
       <p:sp>
         <p:nvSpPr>
-          <p:cNvPr id="40" name="Shape 38"/>
+          <p:cNvPr id="37" name="Shape 35"/>
           <p:cNvSpPr/>
           <p:nvPr/>
         </p:nvSpPr>
@@ -6701,7 +6536,7 @@
       </p:sp>
       <p:sp>
         <p:nvSpPr>
-          <p:cNvPr id="41" name="Shape 39"/>
+          <p:cNvPr id="38" name="Shape 36"/>
           <p:cNvSpPr/>
           <p:nvPr/>
         </p:nvSpPr>
@@ -6724,7 +6559,7 @@
       </p:sp>
       <p:sp>
         <p:nvSpPr>
-          <p:cNvPr id="42" name="Shape 40"/>
+          <p:cNvPr id="39" name="Shape 37"/>
           <p:cNvSpPr/>
           <p:nvPr/>
         </p:nvSpPr>
@@ -6747,7 +6582,7 @@
       </p:sp>
       <p:sp>
         <p:nvSpPr>
-          <p:cNvPr id="43" name="Shape 41"/>
+          <p:cNvPr id="40" name="Shape 38"/>
           <p:cNvSpPr/>
           <p:nvPr/>
         </p:nvSpPr>
@@ -6770,7 +6605,7 @@
       </p:sp>
       <p:sp>
         <p:nvSpPr>
-          <p:cNvPr id="44" name="Shape 42"/>
+          <p:cNvPr id="41" name="Shape 39"/>
           <p:cNvSpPr/>
           <p:nvPr/>
         </p:nvSpPr>
@@ -6938,7 +6773,7 @@
             </a:avLst>
           </a:prstGeom>
           <a:solidFill>
-            <a:srgbClr val="C0654A"/>
+            <a:srgbClr val="B0883B"/>
           </a:solidFill>
           <a:ln/>
         </p:spPr>
@@ -6958,7 +6793,7 @@
                 <a:ea typeface="Outfit" pitchFamily="34" charset="-122"/>
                 <a:cs typeface="Outfit" pitchFamily="34" charset="-120"/>
               </a:rPr>
-              <a:t>6.AT.3a</a:t>
+              <a:t>6.AT.2</a:t>
             </a:r>
             <a:endParaRPr lang="en-US" sz="900" dirty="0"/>
           </a:p>
@@ -7177,7 +7012,7 @@
                 <a:ea typeface="Hanken Grotesk" pitchFamily="34" charset="-122"/>
                 <a:cs typeface="Hanken Grotesk" pitchFamily="34" charset="-120"/>
               </a:rPr>
-              <a:t>Reveal Math Grade 6  ·  Unit 3  ·  Lesson 3-2</a:t>
+              <a:t>Reveal Math Grade 6  ·  Unit 4  ·  Lesson 4-1</a:t>
             </a:r>
             <a:endParaRPr lang="en-US" sz="750" dirty="0"/>
           </a:p>
@@ -7403,7 +7238,7 @@
                 <a:ea typeface="Hanken Grotesk" pitchFamily="34" charset="-122"/>
                 <a:cs typeface="Hanken Grotesk" pitchFamily="34" charset="-120"/>
               </a:rPr>
-              <a:t>Sketch a model for today's problem. Label it using Ratio table and Equivalent ratio.</a:t>
+              <a:t>Sketch a model for today's problem. Label it using Rate and Unit Rate.</a:t>
             </a:r>
             <a:endParaRPr lang="en-US" sz="1000" dirty="0"/>
           </a:p>
@@ -7551,7 +7386,7 @@
                 <a:ea typeface="Hanken Grotesk" pitchFamily="34" charset="-122"/>
                 <a:cs typeface="Hanken Grotesk" pitchFamily="34" charset="-120"/>
               </a:rPr>
-              <a:t>In 2–3 sentences, explain "To keep a ratio the same, multiply both numbers by the same scale factor." in your own words.</a:t>
+              <a:t>In 2–3 sentences, explain "To find a unit rate, divide the total cost by the number of items. The lower cost per item is the better buy." in your own words.</a:t>
             </a:r>
             <a:endParaRPr lang="en-US" sz="1000" dirty="0"/>
           </a:p>
@@ -7847,7 +7682,7 @@
                 <a:ea typeface="Hanken Grotesk" pitchFamily="34" charset="-122"/>
                 <a:cs typeface="Hanken Grotesk" pitchFamily="34" charset="-120"/>
               </a:rPr>
-              <a:t>Write your own problem that uses Ratio table, then solve it and make an answer key.</a:t>
+              <a:t>Write your own problem that uses Rate, then solve it and make an answer key.</a:t>
             </a:r>
             <a:endParaRPr lang="en-US" sz="1000" dirty="0"/>
           </a:p>
@@ -8000,7 +7835,7 @@
             </a:avLst>
           </a:prstGeom>
           <a:solidFill>
-            <a:srgbClr val="C0654A"/>
+            <a:srgbClr val="B0883B"/>
           </a:solidFill>
           <a:ln/>
         </p:spPr>
@@ -8020,7 +7855,7 @@
                 <a:ea typeface="Outfit" pitchFamily="34" charset="-122"/>
                 <a:cs typeface="Outfit" pitchFamily="34" charset="-120"/>
               </a:rPr>
-              <a:t>6.AT.3a</a:t>
+              <a:t>6.AT.2</a:t>
             </a:r>
             <a:endParaRPr lang="en-US" sz="900" dirty="0"/>
           </a:p>
@@ -8239,7 +8074,7 @@
                 <a:ea typeface="Hanken Grotesk" pitchFamily="34" charset="-122"/>
                 <a:cs typeface="Hanken Grotesk" pitchFamily="34" charset="-120"/>
               </a:rPr>
-              <a:t>Reveal Math Grade 6  ·  Unit 3  ·  Lesson 3-2</a:t>
+              <a:t>Reveal Math Grade 6  ·  Unit 4  ·  Lesson 4-1</a:t>
             </a:r>
             <a:endParaRPr lang="en-US" sz="750" dirty="0"/>
           </a:p>
@@ -8335,7 +8170,7 @@
             </a:avLst>
           </a:prstGeom>
           <a:solidFill>
-            <a:srgbClr val="C0654A"/>
+            <a:srgbClr val="B0883B"/>
           </a:solidFill>
           <a:ln/>
         </p:spPr>
@@ -8388,7 +8223,7 @@
             <a:r>
               <a:rPr lang="en-US" sz="1050" b="1" dirty="0">
                 <a:solidFill>
-                  <a:srgbClr val="C0654A"/>
+                  <a:srgbClr val="B0883B"/>
                 </a:solidFill>
                 <a:latin typeface="Hanken Grotesk" pitchFamily="34" charset="0"/>
                 <a:ea typeface="Hanken Grotesk" pitchFamily="34" charset="-122"/>
@@ -8408,7 +8243,7 @@
                 <a:ea typeface="Hanken Grotesk" pitchFamily="34" charset="-122"/>
                 <a:cs typeface="Hanken Grotesk" pitchFamily="34" charset="-120"/>
               </a:rPr>
-              <a:t>In a ratio table, the ratio of sugar to butter is 3:2. If you use 12 cups of sugar, how many cups of butter do you need?</a:t>
+              <a:t>Which token pack from the table above is the best deal?</a:t>
             </a:r>
             <a:endParaRPr lang="en-US" sz="1050" dirty="0"/>
           </a:p>
@@ -8464,7 +8299,7 @@
             <a:r>
               <a:rPr lang="en-US" sz="1050" b="1" dirty="0">
                 <a:solidFill>
-                  <a:srgbClr val="C0654A"/>
+                  <a:srgbClr val="B0883B"/>
                 </a:solidFill>
                 <a:latin typeface="Hanken Grotesk" pitchFamily="34" charset="0"/>
                 <a:ea typeface="Hanken Grotesk" pitchFamily="34" charset="-122"/>
@@ -8484,7 +8319,7 @@
                 <a:ea typeface="Hanken Grotesk" pitchFamily="34" charset="-122"/>
                 <a:cs typeface="Hanken Grotesk" pitchFamily="34" charset="-120"/>
               </a:rPr>
-              <a:t>A ratio table shows 5:8, 10:16, 15:24. What scale factor was used from the first row to the third row?</a:t>
+              <a:t>Runner A completes 4 laps in 12 minutes. Runner B completes 5 laps in 14 minutes. Who runs more laps per minute?</a:t>
             </a:r>
             <a:endParaRPr lang="en-US" sz="1050" dirty="0"/>
           </a:p>
@@ -8540,7 +8375,7 @@
             <a:r>
               <a:rPr lang="en-US" sz="1050" b="1" dirty="0">
                 <a:solidFill>
-                  <a:srgbClr val="C0654A"/>
+                  <a:srgbClr val="B0883B"/>
                 </a:solidFill>
                 <a:latin typeface="Hanken Grotesk" pitchFamily="34" charset="0"/>
                 <a:ea typeface="Hanken Grotesk" pitchFamily="34" charset="-122"/>
@@ -8560,7 +8395,7 @@
                 <a:ea typeface="Hanken Grotesk" pitchFamily="34" charset="-122"/>
                 <a:cs typeface="Hanken Grotesk" pitchFamily="34" charset="-120"/>
               </a:rPr>
-              <a:t>A recipe uses 3 eggs for every 5 cups of flour. How many eggs are needed for 15 cups of flour?</a:t>
+              <a:t>A booth charges $4.50 for 9 games. What is the unit rate?</a:t>
             </a:r>
             <a:endParaRPr lang="en-US" sz="1050" dirty="0"/>
           </a:p>
@@ -8697,7 +8532,7 @@
                 <a:ea typeface="Hanken Grotesk" pitchFamily="34" charset="-122"/>
                 <a:cs typeface="Hanken Grotesk" pitchFamily="34" charset="-120"/>
               </a:rPr>
-              <a:t>The juice bar makes a smoothie with 3 scoops of berries for every 2 cups of yogurt and needs enough for 20 people. How is this the same as our pancake table?</a:t>
+              <a:t>The snack bar sells popcorn as 3 cups for $2.25 or 8 cups for $5.60. How do unit rates help you decide the better buy?</a:t>
             </a:r>
             <a:endParaRPr lang="en-US" sz="1000" dirty="0"/>
           </a:p>
@@ -8965,7 +8800,7 @@
             </a:avLst>
           </a:prstGeom>
           <a:solidFill>
-            <a:srgbClr val="C0654A"/>
+            <a:srgbClr val="B0883B"/>
           </a:solidFill>
           <a:ln/>
         </p:spPr>
@@ -8985,7 +8820,7 @@
                 <a:ea typeface="Outfit" pitchFamily="34" charset="-122"/>
                 <a:cs typeface="Outfit" pitchFamily="34" charset="-120"/>
               </a:rPr>
-              <a:t>6.AT.3a</a:t>
+              <a:t>6.AT.2</a:t>
             </a:r>
             <a:endParaRPr lang="en-US" sz="900" dirty="0"/>
           </a:p>
@@ -9204,7 +9039,7 @@
                 <a:ea typeface="Hanken Grotesk" pitchFamily="34" charset="-122"/>
                 <a:cs typeface="Hanken Grotesk" pitchFamily="34" charset="-120"/>
               </a:rPr>
-              <a:t>Reveal Math Grade 6  ·  Unit 3  ·  Lesson 3-2</a:t>
+              <a:t>Reveal Math Grade 6  ·  Unit 4  ·  Lesson 4-1</a:t>
             </a:r>
             <a:endParaRPr lang="en-US" sz="750" dirty="0"/>
           </a:p>
@@ -9363,7 +9198,7 @@
             <a:r>
               <a:rPr lang="en-US" sz="1100" b="1" dirty="0">
                 <a:solidFill>
-                  <a:srgbClr val="C0654A"/>
+                  <a:srgbClr val="B0883B"/>
                 </a:solidFill>
                 <a:latin typeface="Outfit" pitchFamily="34" charset="0"/>
                 <a:ea typeface="Outfit" pitchFamily="34" charset="-122"/>
@@ -9408,7 +9243,7 @@
                 <a:ea typeface="Hanken Grotesk" pitchFamily="34" charset="-122"/>
                 <a:cs typeface="Hanken Grotesk" pitchFamily="34" charset="-120"/>
               </a:rPr>
-              <a:t>Today's key idea is "To keep a ratio the same, multiply both numbers by the same scale factor." — and it works because ___.</a:t>
+              <a:t>Today's key idea is "To find a unit rate, divide the total cost by the number of items. The lower cost per item is the better buy." — and it works because ___.</a:t>
             </a:r>
             <a:endParaRPr lang="en-US" sz="1050" dirty="0"/>
           </a:p>
@@ -9512,7 +9347,7 @@
             <a:r>
               <a:rPr lang="en-US" sz="1100" b="1" dirty="0">
                 <a:solidFill>
-                  <a:srgbClr val="C0654A"/>
+                  <a:srgbClr val="B0883B"/>
                 </a:solidFill>
                 <a:latin typeface="Outfit" pitchFamily="34" charset="0"/>
                 <a:ea typeface="Outfit" pitchFamily="34" charset="-122"/>
@@ -9557,7 +9392,7 @@
                 <a:ea typeface="Hanken Grotesk" pitchFamily="34" charset="-122"/>
                 <a:cs typeface="Hanken Grotesk" pitchFamily="34" charset="-120"/>
               </a:rPr>
-              <a:t>Because Ratio table means ___, but a tricky part is ___, so I have to ___.</a:t>
+              <a:t>Because Rate means ___, but a tricky part is ___, so I have to ___.</a:t>
             </a:r>
             <a:endParaRPr lang="en-US" sz="1050" dirty="0"/>
           </a:p>
@@ -9661,7 +9496,7 @@
             <a:r>
               <a:rPr lang="en-US" sz="1100" b="1" dirty="0">
                 <a:solidFill>
-                  <a:srgbClr val="C0654A"/>
+                  <a:srgbClr val="B0883B"/>
                 </a:solidFill>
                 <a:latin typeface="Outfit" pitchFamily="34" charset="0"/>
                 <a:ea typeface="Outfit" pitchFamily="34" charset="-122"/>
@@ -9706,7 +9541,7 @@
                 <a:ea typeface="Hanken Grotesk" pitchFamily="34" charset="-122"/>
                 <a:cs typeface="Hanken Grotesk" pitchFamily="34" charset="-120"/>
               </a:rPr>
-              <a:t>A common mistake with Ratio table is ___. It happens because ___, and the fix is ___.</a:t>
+              <a:t>A common mistake with Rate is ___. It happens because ___, and the fix is ___.</a:t>
             </a:r>
             <a:endParaRPr lang="en-US" sz="1050" dirty="0"/>
           </a:p>
@@ -9882,7 +9717,7 @@
             </a:avLst>
           </a:prstGeom>
           <a:solidFill>
-            <a:srgbClr val="C0654A"/>
+            <a:srgbClr val="B0883B"/>
           </a:solidFill>
           <a:ln/>
         </p:spPr>
@@ -9902,7 +9737,7 @@
                 <a:ea typeface="Outfit" pitchFamily="34" charset="-122"/>
                 <a:cs typeface="Outfit" pitchFamily="34" charset="-120"/>
               </a:rPr>
-              <a:t>6.AT.3a</a:t>
+              <a:t>6.AT.2</a:t>
             </a:r>
             <a:endParaRPr lang="en-US" sz="900" dirty="0"/>
           </a:p>
@@ -10121,7 +9956,7 @@
                 <a:ea typeface="Hanken Grotesk" pitchFamily="34" charset="-122"/>
                 <a:cs typeface="Hanken Grotesk" pitchFamily="34" charset="-120"/>
               </a:rPr>
-              <a:t>Reveal Math Grade 6  ·  Unit 3  ·  Lesson 3-2</a:t>
+              <a:t>Reveal Math Grade 6  ·  Unit 4  ·  Lesson 4-1</a:t>
             </a:r>
             <a:endParaRPr lang="en-US" sz="750" dirty="0"/>
           </a:p>
@@ -10559,7 +10394,7 @@
             <a:r>
               <a:rPr lang="en-US" sz="1050" b="1" dirty="0">
                 <a:solidFill>
-                  <a:srgbClr val="C0654A"/>
+                  <a:srgbClr val="B0883B"/>
                 </a:solidFill>
                 <a:latin typeface="Hanken Grotesk" pitchFamily="34" charset="0"/>
                 <a:ea typeface="Hanken Grotesk" pitchFamily="34" charset="-122"/>
@@ -10579,7 +10414,7 @@
                 <a:ea typeface="Hanken Grotesk" pitchFamily="34" charset="-122"/>
                 <a:cs typeface="Hanken Grotesk" pitchFamily="34" charset="-120"/>
               </a:rPr>
-              <a:t>A salad dressing recipe uses 2 tablespoons of oil for every 5 tablespoons of vinegar. How many tablespoons of oil are needed for 20 tablespoons of vinegar?</a:t>
+              <a:t>A store sells 6 pencils for $1.50 and 10 pencils for $2.80. Which is the better buy?</a:t>
             </a:r>
             <a:endParaRPr lang="en-US" sz="1050" dirty="0"/>
           </a:p>
@@ -10618,7 +10453,7 @@
                 <a:ea typeface="Hanken Grotesk" pitchFamily="34" charset="-122"/>
                 <a:cs typeface="Hanken Grotesk" pitchFamily="34" charset="-120"/>
               </a:rPr>
-              <a:t>A.  8</a:t>
+              <a:t>A.  6 for $1.50 — $0.25 each</a:t>
             </a:r>
             <a:endParaRPr lang="en-US" sz="1000" dirty="0"/>
           </a:p>
@@ -10657,7 +10492,7 @@
                 <a:ea typeface="Hanken Grotesk" pitchFamily="34" charset="-122"/>
                 <a:cs typeface="Hanken Grotesk" pitchFamily="34" charset="-120"/>
               </a:rPr>
-              <a:t>B.  10</a:t>
+              <a:t>B.  10 for $2.80 — $0.28 each</a:t>
             </a:r>
             <a:endParaRPr lang="en-US" sz="1000" dirty="0"/>
           </a:p>
@@ -10696,7 +10531,7 @@
                 <a:ea typeface="Hanken Grotesk" pitchFamily="34" charset="-122"/>
                 <a:cs typeface="Hanken Grotesk" pitchFamily="34" charset="-120"/>
               </a:rPr>
-              <a:t>C.  7</a:t>
+              <a:t>C.  They cost the same per pencil</a:t>
             </a:r>
             <a:endParaRPr lang="en-US" sz="1000" dirty="0"/>
           </a:p>
@@ -10735,7 +10570,7 @@
                 <a:ea typeface="Hanken Grotesk" pitchFamily="34" charset="-122"/>
                 <a:cs typeface="Hanken Grotesk" pitchFamily="34" charset="-120"/>
               </a:rPr>
-              <a:t>D.  12</a:t>
+              <a:t>D.  Not enough information</a:t>
             </a:r>
             <a:endParaRPr lang="en-US" sz="1000" dirty="0"/>
           </a:p>
@@ -10768,7 +10603,7 @@
             <a:r>
               <a:rPr lang="en-US" sz="1050" b="1" dirty="0">
                 <a:solidFill>
-                  <a:srgbClr val="C0654A"/>
+                  <a:srgbClr val="B0883B"/>
                 </a:solidFill>
                 <a:latin typeface="Hanken Grotesk" pitchFamily="34" charset="0"/>
                 <a:ea typeface="Hanken Grotesk" pitchFamily="34" charset="-122"/>
@@ -11010,7 +10845,7 @@
             </a:avLst>
           </a:prstGeom>
           <a:solidFill>
-            <a:srgbClr val="C0654A"/>
+            <a:srgbClr val="B0883B"/>
           </a:solidFill>
           <a:ln/>
         </p:spPr>
@@ -11030,7 +10865,7 @@
                 <a:ea typeface="Outfit" pitchFamily="34" charset="-122"/>
                 <a:cs typeface="Outfit" pitchFamily="34" charset="-120"/>
               </a:rPr>
-              <a:t>6.AT.3a</a:t>
+              <a:t>6.AT.2</a:t>
             </a:r>
             <a:endParaRPr lang="en-US" sz="900" dirty="0"/>
           </a:p>
@@ -11249,7 +11084,7 @@
                 <a:ea typeface="Hanken Grotesk" pitchFamily="34" charset="-122"/>
                 <a:cs typeface="Hanken Grotesk" pitchFamily="34" charset="-120"/>
               </a:rPr>
-              <a:t>Reveal Math Grade 6  ·  Unit 3  ·  Lesson 3-2</a:t>
+              <a:t>Reveal Math Grade 6  ·  Unit 4  ·  Lesson 4-1</a:t>
             </a:r>
             <a:endParaRPr lang="en-US" sz="750" dirty="0"/>
           </a:p>
@@ -11363,7 +11198,7 @@
                 <a:ea typeface="Hanken Grotesk" pitchFamily="34" charset="-122"/>
                 <a:cs typeface="Hanken Grotesk" pitchFamily="34" charset="-120"/>
               </a:rPr>
-              <a:t>I can use a ratio table to find equivalent ratios.</a:t>
+              <a:t>I can find a unit rate to compare prices and decide the better buy.</a:t>
             </a:r>
             <a:endParaRPr lang="en-US" sz="1100" dirty="0"/>
           </a:p>
@@ -11418,7 +11253,7 @@
             <a:avLst/>
           </a:prstGeom>
           <a:solidFill>
-            <a:srgbClr val="C0654A"/>
+            <a:srgbClr val="B0883B"/>
           </a:solidFill>
           <a:ln/>
         </p:spPr>
@@ -11628,7 +11463,7 @@
             <a:avLst/>
           </a:prstGeom>
           <a:solidFill>
-            <a:srgbClr val="C0654A"/>
+            <a:srgbClr val="B0883B"/>
           </a:solidFill>
           <a:ln/>
         </p:spPr>
@@ -11838,7 +11673,7 @@
             <a:avLst/>
           </a:prstGeom>
           <a:solidFill>
-            <a:srgbClr val="C0654A"/>
+            <a:srgbClr val="B0883B"/>
           </a:solidFill>
           <a:ln/>
         </p:spPr>
@@ -12048,7 +11883,7 @@
             <a:avLst/>
           </a:prstGeom>
           <a:solidFill>
-            <a:srgbClr val="C0654A"/>
+            <a:srgbClr val="B0883B"/>
           </a:solidFill>
           <a:ln/>
         </p:spPr>
@@ -12270,7 +12105,7 @@
             <a:r>
               <a:rPr lang="en-US" sz="1050" b="1" dirty="0">
                 <a:solidFill>
-                  <a:srgbClr val="C0654A"/>
+                  <a:srgbClr val="B0883B"/>
                 </a:solidFill>
                 <a:latin typeface="Hanken Grotesk" pitchFamily="34" charset="0"/>
                 <a:ea typeface="Hanken Grotesk" pitchFamily="34" charset="-122"/>
@@ -12443,7 +12278,7 @@
             </a:avLst>
           </a:prstGeom>
           <a:solidFill>
-            <a:srgbClr val="C0654A"/>
+            <a:srgbClr val="B0883B"/>
           </a:solidFill>
           <a:ln/>
         </p:spPr>
@@ -12463,7 +12298,7 @@
                 <a:ea typeface="Outfit" pitchFamily="34" charset="-122"/>
                 <a:cs typeface="Outfit" pitchFamily="34" charset="-120"/>
               </a:rPr>
-              <a:t>6.AT.3a</a:t>
+              <a:t>6.AT.2</a:t>
             </a:r>
             <a:endParaRPr lang="en-US" sz="900" dirty="0"/>
           </a:p>
@@ -12682,7 +12517,7 @@
                 <a:ea typeface="Hanken Grotesk" pitchFamily="34" charset="-122"/>
                 <a:cs typeface="Hanken Grotesk" pitchFamily="34" charset="-120"/>
               </a:rPr>
-              <a:t>Reveal Math Grade 6  ·  Unit 3  ·  Lesson 3-2</a:t>
+              <a:t>Reveal Math Grade 6  ·  Unit 4  ·  Lesson 4-1</a:t>
             </a:r>
             <a:endParaRPr lang="en-US" sz="750" dirty="0"/>
           </a:p>
@@ -12817,7 +12652,7 @@
             </a:avLst>
           </a:prstGeom>
           <a:solidFill>
-            <a:srgbClr val="C0654A"/>
+            <a:srgbClr val="B0883B"/>
           </a:solidFill>
           <a:ln/>
         </p:spPr>
@@ -12870,7 +12705,7 @@
             <a:r>
               <a:rPr lang="en-US" sz="1300" b="1" dirty="0">
                 <a:solidFill>
-                  <a:srgbClr val="C0654A"/>
+                  <a:srgbClr val="B0883B"/>
                 </a:solidFill>
                 <a:latin typeface="Outfit" pitchFamily="34" charset="0"/>
                 <a:ea typeface="Outfit" pitchFamily="34" charset="-122"/>
@@ -12932,7 +12767,7 @@
                 <a:ea typeface="Hanken Grotesk" pitchFamily="34" charset="-122"/>
                 <a:cs typeface="Hanken Grotesk" pitchFamily="34" charset="-120"/>
               </a:rPr>
-              <a:t>I can use a ratio table to find equivalent ratios.</a:t>
+              <a:t>I can find a unit rate to compare prices and decide the better buy.</a:t>
             </a:r>
             <a:endParaRPr lang="en-US" sz="1800" dirty="0"/>
           </a:p>
@@ -12989,7 +12824,7 @@
             </a:avLst>
           </a:prstGeom>
           <a:solidFill>
-            <a:srgbClr val="C0654A"/>
+            <a:srgbClr val="B0883B"/>
           </a:solidFill>
           <a:ln/>
         </p:spPr>
@@ -13042,7 +12877,7 @@
             <a:r>
               <a:rPr lang="en-US" sz="1300" b="1" dirty="0">
                 <a:solidFill>
-                  <a:srgbClr val="C0654A"/>
+                  <a:srgbClr val="B0883B"/>
                 </a:solidFill>
                 <a:latin typeface="Outfit" pitchFamily="34" charset="0"/>
                 <a:ea typeface="Outfit" pitchFamily="34" charset="-122"/>
@@ -13104,7 +12939,7 @@
                 <a:ea typeface="Hanken Grotesk" pitchFamily="34" charset="-122"/>
                 <a:cs typeface="Hanken Grotesk" pitchFamily="34" charset="-120"/>
               </a:rPr>
-              <a:t>I can explain my table using the words ratio table, equivalent ratio, scale factor, and pattern.</a:t>
+              <a:t>I can explain my choice using the words rate, unit rate, per, and better buy.</a:t>
             </a:r>
             <a:endParaRPr lang="en-US" sz="1700" dirty="0"/>
           </a:p>
@@ -13257,7 +13092,7 @@
             </a:avLst>
           </a:prstGeom>
           <a:solidFill>
-            <a:srgbClr val="C0654A"/>
+            <a:srgbClr val="B0883B"/>
           </a:solidFill>
           <a:ln/>
         </p:spPr>
@@ -13277,7 +13112,7 @@
                 <a:ea typeface="Outfit" pitchFamily="34" charset="-122"/>
                 <a:cs typeface="Outfit" pitchFamily="34" charset="-120"/>
               </a:rPr>
-              <a:t>6.AT.3a</a:t>
+              <a:t>6.AT.2</a:t>
             </a:r>
             <a:endParaRPr lang="en-US" sz="900" dirty="0"/>
           </a:p>
@@ -13496,7 +13331,7 @@
                 <a:ea typeface="Hanken Grotesk" pitchFamily="34" charset="-122"/>
                 <a:cs typeface="Hanken Grotesk" pitchFamily="34" charset="-120"/>
               </a:rPr>
-              <a:t>Reveal Math Grade 6  ·  Unit 3  ·  Lesson 3-2</a:t>
+              <a:t>Reveal Math Grade 6  ·  Unit 4  ·  Lesson 4-1</a:t>
             </a:r>
             <a:endParaRPr lang="en-US" sz="750" dirty="0"/>
           </a:p>
@@ -13592,7 +13427,7 @@
             </a:avLst>
           </a:prstGeom>
           <a:solidFill>
-            <a:srgbClr val="C0654A"/>
+            <a:srgbClr val="B0883B"/>
           </a:solidFill>
           <a:ln/>
         </p:spPr>
@@ -13693,7 +13528,7 @@
                 <a:ea typeface="Hanken Grotesk" pitchFamily="34" charset="-122"/>
                 <a:cs typeface="Hanken Grotesk" pitchFamily="34" charset="-120"/>
               </a:rPr>
-              <a:t>Chef Reyes's pancake batter uses 2 cups of mix for every 3 cups of milk. To feed 4 times as many people, what happens to BOTH ingredient amounts?</a:t>
+              <a:t>Booth A charges $3 for 5 games and Booth B charges $5 for 8 games. Just by looking, which booth seems like the better deal, and what makes it hard to be sure?</a:t>
             </a:r>
             <a:endParaRPr lang="en-US" sz="1400" dirty="0"/>
           </a:p>
@@ -14023,7 +13858,7 @@
                 <a:ea typeface="Hanken Grotesk" pitchFamily="34" charset="-122"/>
                 <a:cs typeface="Hanken Grotesk" pitchFamily="34" charset="-120"/>
               </a:rPr>
-              <a:t>Ratio table</a:t>
+              <a:t>rate</a:t>
             </a:r>
             <a:endParaRPr lang="en-US" sz="900" dirty="0"/>
           </a:p>
@@ -14070,7 +13905,7 @@
                 <a:ea typeface="Hanken Grotesk" pitchFamily="34" charset="-122"/>
                 <a:cs typeface="Hanken Grotesk" pitchFamily="34" charset="-120"/>
               </a:rPr>
-              <a:t>Equivalent ratio</a:t>
+              <a:t>per</a:t>
             </a:r>
             <a:endParaRPr lang="en-US" sz="900" dirty="0"/>
           </a:p>
@@ -14117,7 +13952,54 @@
                 <a:ea typeface="Hanken Grotesk" pitchFamily="34" charset="-122"/>
                 <a:cs typeface="Hanken Grotesk" pitchFamily="34" charset="-120"/>
               </a:rPr>
-              <a:t>Scale factor</a:t>
+              <a:t>ratio</a:t>
+            </a:r>
+            <a:endParaRPr lang="en-US" sz="900" dirty="0"/>
+          </a:p>
+        </p:txBody>
+      </p:sp>
+      <p:sp>
+        <p:nvSpPr>
+          <p:cNvPr id="31" name="Text 29"/>
+          <p:cNvSpPr/>
+          <p:nvPr/>
+        </p:nvSpPr>
+        <p:spPr>
+          <a:xfrm>
+            <a:off x="7520940" y="3227832"/>
+            <a:ext cx="1120140" cy="329184"/>
+          </a:xfrm>
+          <a:prstGeom prst="roundRect">
+            <a:avLst>
+              <a:gd name="adj" fmla="val 13889"/>
+            </a:avLst>
+          </a:prstGeom>
+          <a:solidFill>
+            <a:srgbClr val="FFFFFF"/>
+          </a:solidFill>
+          <a:ln w="12700">
+            <a:solidFill>
+              <a:srgbClr val="D6DBDF"/>
+            </a:solidFill>
+          </a:ln>
+        </p:spPr>
+        <p:txBody>
+          <a:bodyPr wrap="square" rtlCol="0" anchor="ctr"/>
+          <a:lstStyle/>
+          <a:p>
+            <a:pPr algn="ctr" indent="0" marL="0">
+              <a:buNone/>
+            </a:pPr>
+            <a:r>
+              <a:rPr lang="en-US" sz="900" b="1" dirty="0">
+                <a:solidFill>
+                  <a:srgbClr val="17324D"/>
+                </a:solidFill>
+                <a:latin typeface="Hanken Grotesk" pitchFamily="34" charset="0"/>
+                <a:ea typeface="Hanken Grotesk" pitchFamily="34" charset="-122"/>
+                <a:cs typeface="Hanken Grotesk" pitchFamily="34" charset="-120"/>
+              </a:rPr>
+              <a:t>compare</a:t>
             </a:r>
             <a:endParaRPr lang="en-US" sz="900" dirty="0"/>
           </a:p>
@@ -14270,7 +14152,7 @@
             </a:avLst>
           </a:prstGeom>
           <a:solidFill>
-            <a:srgbClr val="C0654A"/>
+            <a:srgbClr val="B0883B"/>
           </a:solidFill>
           <a:ln/>
         </p:spPr>
@@ -14290,7 +14172,7 @@
                 <a:ea typeface="Outfit" pitchFamily="34" charset="-122"/>
                 <a:cs typeface="Outfit" pitchFamily="34" charset="-120"/>
               </a:rPr>
-              <a:t>6.AT.3a</a:t>
+              <a:t>6.AT.2</a:t>
             </a:r>
             <a:endParaRPr lang="en-US" sz="900" dirty="0"/>
           </a:p>
@@ -14509,7 +14391,7 @@
                 <a:ea typeface="Hanken Grotesk" pitchFamily="34" charset="-122"/>
                 <a:cs typeface="Hanken Grotesk" pitchFamily="34" charset="-120"/>
               </a:rPr>
-              <a:t>Reveal Math Grade 6  ·  Unit 3  ·  Lesson 3-2</a:t>
+              <a:t>Reveal Math Grade 6  ·  Unit 4  ·  Lesson 4-1</a:t>
             </a:r>
             <a:endParaRPr lang="en-US" sz="750" dirty="0"/>
           </a:p>
@@ -14605,7 +14487,7 @@
             </a:avLst>
           </a:prstGeom>
           <a:solidFill>
-            <a:srgbClr val="C0654A"/>
+            <a:srgbClr val="B0883B"/>
           </a:solidFill>
           <a:ln/>
         </p:spPr>
@@ -14706,7 +14588,7 @@
                 <a:ea typeface="Hanken Grotesk" pitchFamily="34" charset="-122"/>
                 <a:cs typeface="Hanken Grotesk" pitchFamily="34" charset="-120"/>
               </a:rPr>
-              <a:t>In your pancake ratio table, how did you find each new row from the 2:3 starting row?</a:t>
+              <a:t>How did you find the cost per game (the unit rate) for each booth, and what did you divide?</a:t>
             </a:r>
             <a:endParaRPr lang="en-US" sz="1400" dirty="0"/>
           </a:p>
@@ -15036,7 +14918,7 @@
                 <a:ea typeface="Hanken Grotesk" pitchFamily="34" charset="-122"/>
                 <a:cs typeface="Hanken Grotesk" pitchFamily="34" charset="-120"/>
               </a:rPr>
-              <a:t>Ratio table</a:t>
+              <a:t>unit rate</a:t>
             </a:r>
             <a:endParaRPr lang="en-US" sz="900" dirty="0"/>
           </a:p>
@@ -15083,7 +14965,7 @@
                 <a:ea typeface="Hanken Grotesk" pitchFamily="34" charset="-122"/>
                 <a:cs typeface="Hanken Grotesk" pitchFamily="34" charset="-120"/>
               </a:rPr>
-              <a:t>Equivalent ratio</a:t>
+              <a:t>divide</a:t>
             </a:r>
             <a:endParaRPr lang="en-US" sz="900" dirty="0"/>
           </a:p>
@@ -15130,7 +15012,7 @@
                 <a:ea typeface="Hanken Grotesk" pitchFamily="34" charset="-122"/>
                 <a:cs typeface="Hanken Grotesk" pitchFamily="34" charset="-120"/>
               </a:rPr>
-              <a:t>Scale factor</a:t>
+              <a:t>per</a:t>
             </a:r>
             <a:endParaRPr lang="en-US" sz="900" dirty="0"/>
           </a:p>
@@ -15177,7 +15059,54 @@
                 <a:ea typeface="Hanken Grotesk" pitchFamily="34" charset="-122"/>
                 <a:cs typeface="Hanken Grotesk" pitchFamily="34" charset="-120"/>
               </a:rPr>
-              <a:t>Pattern</a:t>
+              <a:t>rate</a:t>
+            </a:r>
+            <a:endParaRPr lang="en-US" sz="900" dirty="0"/>
+          </a:p>
+        </p:txBody>
+      </p:sp>
+      <p:sp>
+        <p:nvSpPr>
+          <p:cNvPr id="32" name="Text 30"/>
+          <p:cNvSpPr/>
+          <p:nvPr/>
+        </p:nvSpPr>
+        <p:spPr>
+          <a:xfrm>
+            <a:off x="6263640" y="3666744"/>
+            <a:ext cx="1120140" cy="329184"/>
+          </a:xfrm>
+          <a:prstGeom prst="roundRect">
+            <a:avLst>
+              <a:gd name="adj" fmla="val 13889"/>
+            </a:avLst>
+          </a:prstGeom>
+          <a:solidFill>
+            <a:srgbClr val="FFFFFF"/>
+          </a:solidFill>
+          <a:ln w="12700">
+            <a:solidFill>
+              <a:srgbClr val="D6DBDF"/>
+            </a:solidFill>
+          </a:ln>
+        </p:spPr>
+        <p:txBody>
+          <a:bodyPr wrap="square" rtlCol="0" anchor="ctr"/>
+          <a:lstStyle/>
+          <a:p>
+            <a:pPr algn="ctr" indent="0" marL="0">
+              <a:buNone/>
+            </a:pPr>
+            <a:r>
+              <a:rPr lang="en-US" sz="900" b="1" dirty="0">
+                <a:solidFill>
+                  <a:srgbClr val="17324D"/>
+                </a:solidFill>
+                <a:latin typeface="Hanken Grotesk" pitchFamily="34" charset="0"/>
+                <a:ea typeface="Hanken Grotesk" pitchFamily="34" charset="-122"/>
+                <a:cs typeface="Hanken Grotesk" pitchFamily="34" charset="-120"/>
+              </a:rPr>
+              <a:t>cost</a:t>
             </a:r>
             <a:endParaRPr lang="en-US" sz="900" dirty="0"/>
           </a:p>
@@ -15330,7 +15259,7 @@
             </a:avLst>
           </a:prstGeom>
           <a:solidFill>
-            <a:srgbClr val="C0654A"/>
+            <a:srgbClr val="B0883B"/>
           </a:solidFill>
           <a:ln/>
         </p:spPr>
@@ -15350,7 +15279,7 @@
                 <a:ea typeface="Outfit" pitchFamily="34" charset="-122"/>
                 <a:cs typeface="Outfit" pitchFamily="34" charset="-120"/>
               </a:rPr>
-              <a:t>6.AT.3a</a:t>
+              <a:t>6.AT.2</a:t>
             </a:r>
             <a:endParaRPr lang="en-US" sz="900" dirty="0"/>
           </a:p>
@@ -15569,7 +15498,7 @@
                 <a:ea typeface="Hanken Grotesk" pitchFamily="34" charset="-122"/>
                 <a:cs typeface="Hanken Grotesk" pitchFamily="34" charset="-120"/>
               </a:rPr>
-              <a:t>Reveal Math Grade 6  ·  Unit 3  ·  Lesson 3-2</a:t>
+              <a:t>Reveal Math Grade 6  ·  Unit 4  ·  Lesson 4-1</a:t>
             </a:r>
             <a:endParaRPr lang="en-US" sz="750" dirty="0"/>
           </a:p>
@@ -15665,7 +15594,7 @@
             </a:avLst>
           </a:prstGeom>
           <a:solidFill>
-            <a:srgbClr val="C0654A"/>
+            <a:srgbClr val="B0883B"/>
           </a:solidFill>
           <a:ln/>
         </p:spPr>
@@ -15766,7 +15695,7 @@
                 <a:ea typeface="Hanken Grotesk" pitchFamily="34" charset="-122"/>
                 <a:cs typeface="Hanken Grotesk" pitchFamily="34" charset="-120"/>
               </a:rPr>
-              <a:t>The juice bar makes a smoothie with 3 scoops of berries for every 2 cups of yogurt and needs enough for 20 people. How is this the same as our pancake table?</a:t>
+              <a:t>The snack bar sells popcorn as 3 cups for $2.25 or 8 cups for $5.60. How do unit rates help you decide the better buy?</a:t>
             </a:r>
             <a:endParaRPr lang="en-US" sz="1400" dirty="0"/>
           </a:p>
@@ -16096,7 +16025,7 @@
                 <a:ea typeface="Hanken Grotesk" pitchFamily="34" charset="-122"/>
                 <a:cs typeface="Hanken Grotesk" pitchFamily="34" charset="-120"/>
               </a:rPr>
-              <a:t>Ratio table</a:t>
+              <a:t>unit rate</a:t>
             </a:r>
             <a:endParaRPr lang="en-US" sz="900" dirty="0"/>
           </a:p>
@@ -16143,7 +16072,7 @@
                 <a:ea typeface="Hanken Grotesk" pitchFamily="34" charset="-122"/>
                 <a:cs typeface="Hanken Grotesk" pitchFamily="34" charset="-120"/>
               </a:rPr>
-              <a:t>Equivalent ratio</a:t>
+              <a:t>better buy</a:t>
             </a:r>
             <a:endParaRPr lang="en-US" sz="900" dirty="0"/>
           </a:p>
@@ -16190,7 +16119,7 @@
                 <a:ea typeface="Hanken Grotesk" pitchFamily="34" charset="-122"/>
                 <a:cs typeface="Hanken Grotesk" pitchFamily="34" charset="-120"/>
               </a:rPr>
-              <a:t>Scale factor</a:t>
+              <a:t>divide</a:t>
             </a:r>
             <a:endParaRPr lang="en-US" sz="900" dirty="0"/>
           </a:p>
@@ -16237,7 +16166,54 @@
                 <a:ea typeface="Hanken Grotesk" pitchFamily="34" charset="-122"/>
                 <a:cs typeface="Hanken Grotesk" pitchFamily="34" charset="-120"/>
               </a:rPr>
-              <a:t>Pattern</a:t>
+              <a:t>per</a:t>
+            </a:r>
+            <a:endParaRPr lang="en-US" sz="900" dirty="0"/>
+          </a:p>
+        </p:txBody>
+      </p:sp>
+      <p:sp>
+        <p:nvSpPr>
+          <p:cNvPr id="32" name="Text 30"/>
+          <p:cNvSpPr/>
+          <p:nvPr/>
+        </p:nvSpPr>
+        <p:spPr>
+          <a:xfrm>
+            <a:off x="6263640" y="3666744"/>
+            <a:ext cx="1120140" cy="329184"/>
+          </a:xfrm>
+          <a:prstGeom prst="roundRect">
+            <a:avLst>
+              <a:gd name="adj" fmla="val 13889"/>
+            </a:avLst>
+          </a:prstGeom>
+          <a:solidFill>
+            <a:srgbClr val="FFFFFF"/>
+          </a:solidFill>
+          <a:ln w="12700">
+            <a:solidFill>
+              <a:srgbClr val="D6DBDF"/>
+            </a:solidFill>
+          </a:ln>
+        </p:spPr>
+        <p:txBody>
+          <a:bodyPr wrap="square" rtlCol="0" anchor="ctr"/>
+          <a:lstStyle/>
+          <a:p>
+            <a:pPr algn="ctr" indent="0" marL="0">
+              <a:buNone/>
+            </a:pPr>
+            <a:r>
+              <a:rPr lang="en-US" sz="900" b="1" dirty="0">
+                <a:solidFill>
+                  <a:srgbClr val="17324D"/>
+                </a:solidFill>
+                <a:latin typeface="Hanken Grotesk" pitchFamily="34" charset="0"/>
+                <a:ea typeface="Hanken Grotesk" pitchFamily="34" charset="-122"/>
+                <a:cs typeface="Hanken Grotesk" pitchFamily="34" charset="-120"/>
+              </a:rPr>
+              <a:t>cost</a:t>
             </a:r>
             <a:endParaRPr lang="en-US" sz="900" dirty="0"/>
           </a:p>
@@ -16390,7 +16366,7 @@
             </a:avLst>
           </a:prstGeom>
           <a:solidFill>
-            <a:srgbClr val="C0654A"/>
+            <a:srgbClr val="B0883B"/>
           </a:solidFill>
           <a:ln/>
         </p:spPr>
@@ -16410,7 +16386,7 @@
                 <a:ea typeface="Outfit" pitchFamily="34" charset="-122"/>
                 <a:cs typeface="Outfit" pitchFamily="34" charset="-120"/>
               </a:rPr>
-              <a:t>6.AT.3a</a:t>
+              <a:t>6.AT.2</a:t>
             </a:r>
             <a:endParaRPr lang="en-US" sz="900" dirty="0"/>
           </a:p>
@@ -16629,7 +16605,7 @@
                 <a:ea typeface="Hanken Grotesk" pitchFamily="34" charset="-122"/>
                 <a:cs typeface="Hanken Grotesk" pitchFamily="34" charset="-120"/>
               </a:rPr>
-              <a:t>Reveal Math Grade 6  ·  Unit 3  ·  Lesson 3-2</a:t>
+              <a:t>Reveal Math Grade 6  ·  Unit 4  ·  Lesson 4-1</a:t>
             </a:r>
             <a:endParaRPr lang="en-US" sz="750" dirty="0"/>
           </a:p>
@@ -16725,7 +16701,7 @@
             </a:avLst>
           </a:prstGeom>
           <a:solidFill>
-            <a:srgbClr val="C0654A"/>
+            <a:srgbClr val="B0883B"/>
           </a:solidFill>
           <a:ln/>
         </p:spPr>
@@ -16826,7 +16802,7 @@
                 <a:ea typeface="Hanken Grotesk" pitchFamily="34" charset="-122"/>
                 <a:cs typeface="Hanken Grotesk" pitchFamily="34" charset="-120"/>
               </a:rPr>
-              <a:t>During practice on Ratio Tables, what strategy did you use when a problem felt tricky?</a:t>
+              <a:t>During practice on Rates and Unit Rates, what strategy did you use when a problem felt tricky?</a:t>
             </a:r>
             <a:endParaRPr lang="en-US" sz="1400" dirty="0"/>
           </a:p>
@@ -17156,7 +17132,7 @@
                 <a:ea typeface="Hanken Grotesk" pitchFamily="34" charset="-122"/>
                 <a:cs typeface="Hanken Grotesk" pitchFamily="34" charset="-120"/>
               </a:rPr>
-              <a:t>Ratio table</a:t>
+              <a:t>Rate</a:t>
             </a:r>
             <a:endParaRPr lang="en-US" sz="900" dirty="0"/>
           </a:p>
@@ -17203,7 +17179,7 @@
                 <a:ea typeface="Hanken Grotesk" pitchFamily="34" charset="-122"/>
                 <a:cs typeface="Hanken Grotesk" pitchFamily="34" charset="-120"/>
               </a:rPr>
-              <a:t>Equivalent ratio</a:t>
+              <a:t>Unit Rate</a:t>
             </a:r>
             <a:endParaRPr lang="en-US" sz="900" dirty="0"/>
           </a:p>
@@ -17250,7 +17226,7 @@
                 <a:ea typeface="Hanken Grotesk" pitchFamily="34" charset="-122"/>
                 <a:cs typeface="Hanken Grotesk" pitchFamily="34" charset="-120"/>
               </a:rPr>
-              <a:t>Scale factor</a:t>
+              <a:t>Per</a:t>
             </a:r>
             <a:endParaRPr lang="en-US" sz="900" dirty="0"/>
           </a:p>
@@ -17297,7 +17273,7 @@
                 <a:ea typeface="Hanken Grotesk" pitchFamily="34" charset="-122"/>
                 <a:cs typeface="Hanken Grotesk" pitchFamily="34" charset="-120"/>
               </a:rPr>
-              <a:t>Pattern</a:t>
+              <a:t>Ratio</a:t>
             </a:r>
             <a:endParaRPr lang="en-US" sz="900" dirty="0"/>
           </a:p>
@@ -17450,7 +17426,7 @@
             </a:avLst>
           </a:prstGeom>
           <a:solidFill>
-            <a:srgbClr val="C0654A"/>
+            <a:srgbClr val="B0883B"/>
           </a:solidFill>
           <a:ln/>
         </p:spPr>
@@ -17470,7 +17446,7 @@
                 <a:ea typeface="Outfit" pitchFamily="34" charset="-122"/>
                 <a:cs typeface="Outfit" pitchFamily="34" charset="-120"/>
               </a:rPr>
-              <a:t>6.AT.3a</a:t>
+              <a:t>6.AT.2</a:t>
             </a:r>
             <a:endParaRPr lang="en-US" sz="900" dirty="0"/>
           </a:p>
@@ -17689,7 +17665,7 @@
                 <a:ea typeface="Hanken Grotesk" pitchFamily="34" charset="-122"/>
                 <a:cs typeface="Hanken Grotesk" pitchFamily="34" charset="-120"/>
               </a:rPr>
-              <a:t>Reveal Math Grade 6  ·  Unit 3  ·  Lesson 3-2</a:t>
+              <a:t>Reveal Math Grade 6  ·  Unit 4  ·  Lesson 4-1</a:t>
             </a:r>
             <a:endParaRPr lang="en-US" sz="750" dirty="0"/>
           </a:p>
@@ -17785,7 +17761,7 @@
             </a:avLst>
           </a:prstGeom>
           <a:solidFill>
-            <a:srgbClr val="C0654A"/>
+            <a:srgbClr val="B0883B"/>
           </a:solidFill>
           <a:ln/>
         </p:spPr>
@@ -17844,7 +17820,7 @@
                 <a:ea typeface="Outfit" pitchFamily="34" charset="-122"/>
                 <a:cs typeface="Outfit" pitchFamily="34" charset="-120"/>
               </a:rPr>
-              <a:t>Scenario</a:t>
+              <a:t>Arcade Builder Challenge</a:t>
             </a:r>
             <a:endParaRPr lang="en-US" sz="1100" dirty="0"/>
           </a:p>
@@ -17883,7 +17859,7 @@
                 <a:ea typeface="Hanken Grotesk" pitchFamily="34" charset="-122"/>
                 <a:cs typeface="Hanken Grotesk" pitchFamily="34" charset="-120"/>
               </a:rPr>
-              <a:t>Chef Academy is hosting a pancake breakfast for the whole school! Chef Reyes's famous pancake batter uses 2 cups of mix for every 3 cups of milk. The team needs to scale the recipe to feed 4 times as many people. Can you help them build a ratio table to figure out how much of each ingredient they need?</a:t>
+              <a:t>You're comparing ticket prices at different game booths in the arcade. Booth A charges $3 for 5 games, and Booth B charges $5 for 8 games. Which booth gives you a better deal? To find out, you need to figure out the cost per game — that's the unit rate!</a:t>
             </a:r>
             <a:endParaRPr lang="en-US" sz="1150" dirty="0"/>
           </a:p>
@@ -18108,7 +18084,7 @@
                 <a:ea typeface="Hanken Grotesk" pitchFamily="34" charset="-122"/>
                 <a:cs typeface="Hanken Grotesk" pitchFamily="34" charset="-120"/>
               </a:rPr>
-              <a:t>•  What two quantities are being compared in the recipe?</a:t>
+              <a:t>•  What two quantities are being compared at each booth?</a:t>
             </a:r>
             <a:endParaRPr lang="en-US" sz="1000" dirty="0"/>
           </a:p>
@@ -18128,27 +18104,7 @@
                 <a:ea typeface="Hanken Grotesk" pitchFamily="34" charset="-122"/>
                 <a:cs typeface="Hanken Grotesk" pitchFamily="34" charset="-120"/>
               </a:rPr>
-              <a:t>•  What happens to both quantities when you double the recipe?</a:t>
-            </a:r>
-            <a:endParaRPr lang="en-US" sz="1000" dirty="0"/>
-          </a:p>
-          <a:p>
-            <a:pPr indent="0" marL="0">
-              <a:lnSpc>
-                <a:spcPct val="110000"/>
-              </a:lnSpc>
-              <a:buNone/>
-            </a:pPr>
-            <a:r>
-              <a:rPr lang="en-US" sz="1000" dirty="0">
-                <a:solidFill>
-                  <a:srgbClr val="24323F"/>
-                </a:solidFill>
-                <a:latin typeface="Hanken Grotesk" pitchFamily="34" charset="0"/>
-                <a:ea typeface="Hanken Grotesk" pitchFamily="34" charset="-122"/>
-                <a:cs typeface="Hanken Grotesk" pitchFamily="34" charset="-120"/>
-              </a:rPr>
-              <a:t>•  How could a table help you organize the scaling?</a:t>
+              <a:t>•  Which booth seems like a better deal at first glance?</a:t>
             </a:r>
             <a:endParaRPr lang="en-US" sz="1000" dirty="0"/>
           </a:p>
@@ -18265,7 +18221,7 @@
                 <a:ea typeface="Hanken Grotesk" pitchFamily="34" charset="-122"/>
                 <a:cs typeface="Hanken Grotesk" pitchFamily="34" charset="-120"/>
               </a:rPr>
-              <a:t>•  What if we only needed to make half the original recipe?</a:t>
+              <a:t>•  How can you compare prices when the number of games is different?</a:t>
             </a:r>
             <a:endParaRPr lang="en-US" sz="1000" dirty="0"/>
           </a:p>
@@ -18285,7 +18241,7 @@
                 <a:ea typeface="Hanken Grotesk" pitchFamily="34" charset="-122"/>
                 <a:cs typeface="Hanken Grotesk" pitchFamily="34" charset="-120"/>
               </a:rPr>
-              <a:t>•  Is there a shortcut to find any row in the table without filling every row?</a:t>
+              <a:t>•  What does it mean to find the cost for just one game?</a:t>
             </a:r>
             <a:endParaRPr lang="en-US" sz="1000" dirty="0"/>
           </a:p>
@@ -18438,7 +18394,7 @@
             </a:avLst>
           </a:prstGeom>
           <a:solidFill>
-            <a:srgbClr val="C0654A"/>
+            <a:srgbClr val="B0883B"/>
           </a:solidFill>
           <a:ln/>
         </p:spPr>
@@ -18458,7 +18414,7 @@
                 <a:ea typeface="Outfit" pitchFamily="34" charset="-122"/>
                 <a:cs typeface="Outfit" pitchFamily="34" charset="-120"/>
               </a:rPr>
-              <a:t>6.AT.3a</a:t>
+              <a:t>6.AT.2</a:t>
             </a:r>
             <a:endParaRPr lang="en-US" sz="900" dirty="0"/>
           </a:p>
@@ -18677,7 +18633,7 @@
                 <a:ea typeface="Hanken Grotesk" pitchFamily="34" charset="-122"/>
                 <a:cs typeface="Hanken Grotesk" pitchFamily="34" charset="-120"/>
               </a:rPr>
-              <a:t>Reveal Math Grade 6  ·  Unit 3  ·  Lesson 3-2</a:t>
+              <a:t>Reveal Math Grade 6  ·  Unit 4  ·  Lesson 4-1</a:t>
             </a:r>
             <a:endParaRPr lang="en-US" sz="750" dirty="0"/>
           </a:p>
@@ -18973,7 +18929,7 @@
                           <a:ea typeface="Hanken Grotesk" pitchFamily="34" charset="-122"/>
                           <a:cs typeface="Hanken Grotesk" pitchFamily="34" charset="-120"/>
                         </a:rPr>
-                        <a:t>Ratio table</a:t>
+                        <a:t>Rate</a:t>
                       </a:r>
                       <a:pPr indent="0" marL="0">
                         <a:buNone/>
@@ -18997,7 +18953,7 @@
                           <a:ea typeface="Hanken Grotesk" pitchFamily="34" charset="-122"/>
                           <a:cs typeface="Hanken Grotesk" pitchFamily="34" charset="-120"/>
                         </a:rPr>
-                        <a:t>Tabla de razones</a:t>
+                        <a:t>Tasa</a:t>
                       </a:r>
                       <a:endParaRPr lang="en-US" sz="950" dirty="0">
                         <a:latin typeface="Hanken Grotesk" charset="0"/>
@@ -19065,7 +19021,7 @@
                           <a:ea typeface="Hanken Grotesk" pitchFamily="34" charset="-122"/>
                           <a:cs typeface="Hanken Grotesk" pitchFamily="34" charset="-120"/>
                         </a:rPr>
-                        <a:t>A table of equal ratios that shows a pattern.</a:t>
+                        <a:t>A ratio comparing two amounts with different units, like miles per hour.</a:t>
                       </a:r>
                       <a:pPr indent="0" marL="0">
                         <a:buNone/>
@@ -19089,7 +19045,7 @@
                           <a:ea typeface="Hanken Grotesk" pitchFamily="34" charset="-122"/>
                           <a:cs typeface="Hanken Grotesk" pitchFamily="34" charset="-120"/>
                         </a:rPr>
-                        <a:t>Una tabla de razones iguales que muestra un patrón.</a:t>
+                        <a:t>Una razón que compara dos cantidades con unidades distintas, como millas por hora.</a:t>
                       </a:r>
                       <a:endParaRPr lang="en-US" sz="900" dirty="0">
                         <a:latin typeface="Hanken Grotesk" charset="0"/>
@@ -19157,7 +19113,7 @@
                           <a:ea typeface="Hanken Grotesk" pitchFamily="34" charset="-122"/>
                           <a:cs typeface="Hanken Grotesk" pitchFamily="34" charset="-120"/>
                         </a:rPr>
-                        <a:t>Cups of juice: 2, 4, 6 | Cups of water: 3, 6, 9</a:t>
+                        <a:t>$12 for 4 games is a rate</a:t>
                       </a:r>
                       <a:endParaRPr lang="en-US" sz="900" dirty="0">
                         <a:latin typeface="Hanken Grotesk" charset="0"/>
@@ -19227,7 +19183,7 @@
                           <a:ea typeface="Hanken Grotesk" pitchFamily="34" charset="-122"/>
                           <a:cs typeface="Hanken Grotesk" pitchFamily="34" charset="-120"/>
                         </a:rPr>
-                        <a:t>Equivalent ratio</a:t>
+                        <a:t>Unit Rate</a:t>
                       </a:r>
                       <a:pPr indent="0" marL="0">
                         <a:buNone/>
@@ -19251,7 +19207,7 @@
                           <a:ea typeface="Hanken Grotesk" pitchFamily="34" charset="-122"/>
                           <a:cs typeface="Hanken Grotesk" pitchFamily="34" charset="-120"/>
                         </a:rPr>
-                        <a:t>Razón equivalente</a:t>
+                        <a:t>Tasa unitaria</a:t>
                       </a:r>
                       <a:endParaRPr lang="en-US" sz="950" dirty="0">
                         <a:latin typeface="Hanken Grotesk" charset="0"/>
@@ -19319,7 +19275,7 @@
                           <a:ea typeface="Hanken Grotesk" pitchFamily="34" charset="-122"/>
                           <a:cs typeface="Hanken Grotesk" pitchFamily="34" charset="-120"/>
                         </a:rPr>
-                        <a:t>Two ratios that mean the same thing, like 1:2 and 2:4.</a:t>
+                        <a:t>A rate for just 1 of something, like cost for 1 item.</a:t>
                       </a:r>
                       <a:pPr indent="0" marL="0">
                         <a:buNone/>
@@ -19343,7 +19299,7 @@
                           <a:ea typeface="Hanken Grotesk" pitchFamily="34" charset="-122"/>
                           <a:cs typeface="Hanken Grotesk" pitchFamily="34" charset="-120"/>
                         </a:rPr>
-                        <a:t>Dos razones que significan lo mismo, como 1:2 y 2:4.</a:t>
+                        <a:t>Una tasa para solo 1 de algo, como el precio de 1 artículo.</a:t>
                       </a:r>
                       <a:endParaRPr lang="en-US" sz="900" dirty="0">
                         <a:latin typeface="Hanken Grotesk" charset="0"/>
@@ -19411,7 +19367,7 @@
                           <a:ea typeface="Hanken Grotesk" pitchFamily="34" charset="-122"/>
                           <a:cs typeface="Hanken Grotesk" pitchFamily="34" charset="-120"/>
                         </a:rPr>
-                        <a:t>2:3 = 4:6 = 6:9</a:t>
+                        <a:t>$3 per 1 game</a:t>
                       </a:r>
                       <a:endParaRPr lang="en-US" sz="900" dirty="0">
                         <a:latin typeface="Hanken Grotesk" charset="0"/>
@@ -19481,7 +19437,7 @@
                           <a:ea typeface="Hanken Grotesk" pitchFamily="34" charset="-122"/>
                           <a:cs typeface="Hanken Grotesk" pitchFamily="34" charset="-120"/>
                         </a:rPr>
-                        <a:t>Scale factor</a:t>
+                        <a:t>Per</a:t>
                       </a:r>
                       <a:pPr indent="0" marL="0">
                         <a:buNone/>
@@ -19505,7 +19461,7 @@
                           <a:ea typeface="Hanken Grotesk" pitchFamily="34" charset="-122"/>
                           <a:cs typeface="Hanken Grotesk" pitchFamily="34" charset="-120"/>
                         </a:rPr>
-                        <a:t>Factor de escala</a:t>
+                        <a:t>Por</a:t>
                       </a:r>
                       <a:endParaRPr lang="en-US" sz="950" dirty="0">
                         <a:latin typeface="Hanken Grotesk" charset="0"/>
@@ -19573,7 +19529,7 @@
                           <a:ea typeface="Hanken Grotesk" pitchFamily="34" charset="-122"/>
                           <a:cs typeface="Hanken Grotesk" pitchFamily="34" charset="-120"/>
                         </a:rPr>
-                        <a:t>The number you multiply both parts of a ratio by to get an equal ratio.</a:t>
+                        <a:t>For each one. Example: 5 dollars per book.</a:t>
                       </a:r>
                       <a:pPr indent="0" marL="0">
                         <a:buNone/>
@@ -19597,7 +19553,7 @@
                           <a:ea typeface="Hanken Grotesk" pitchFamily="34" charset="-122"/>
                           <a:cs typeface="Hanken Grotesk" pitchFamily="34" charset="-120"/>
                         </a:rPr>
-                        <a:t>El número por el que multiplicas ambas partes de una razón para obtener una razón igual.</a:t>
+                        <a:t>Por cada uno. Ejemplo: 5 dólares por libro.</a:t>
                       </a:r>
                       <a:endParaRPr lang="en-US" sz="900" dirty="0">
                         <a:latin typeface="Hanken Grotesk" charset="0"/>
@@ -19665,7 +19621,7 @@
                           <a:ea typeface="Hanken Grotesk" pitchFamily="34" charset="-122"/>
                           <a:cs typeface="Hanken Grotesk" pitchFamily="34" charset="-120"/>
                         </a:rPr>
-                        <a:t>2:3 × 2 → 4:6 (scale factor is 2)</a:t>
+                        <a:t>60 miles per hour means 60 miles for every 1 hour</a:t>
                       </a:r>
                       <a:endParaRPr lang="en-US" sz="900" dirty="0">
                         <a:latin typeface="Hanken Grotesk" charset="0"/>
@@ -19735,7 +19691,7 @@
                           <a:ea typeface="Hanken Grotesk" pitchFamily="34" charset="-122"/>
                           <a:cs typeface="Hanken Grotesk" pitchFamily="34" charset="-120"/>
                         </a:rPr>
-                        <a:t>Pattern</a:t>
+                        <a:t>Ratio</a:t>
                       </a:r>
                       <a:pPr indent="0" marL="0">
                         <a:buNone/>
@@ -19759,7 +19715,7 @@
                           <a:ea typeface="Hanken Grotesk" pitchFamily="34" charset="-122"/>
                           <a:cs typeface="Hanken Grotesk" pitchFamily="34" charset="-120"/>
                         </a:rPr>
-                        <a:t>Patrón</a:t>
+                        <a:t>Razón</a:t>
                       </a:r>
                       <a:endParaRPr lang="en-US" sz="950" dirty="0">
                         <a:latin typeface="Hanken Grotesk" charset="0"/>
@@ -19827,7 +19783,7 @@
                           <a:ea typeface="Hanken Grotesk" pitchFamily="34" charset="-122"/>
                           <a:cs typeface="Hanken Grotesk" pitchFamily="34" charset="-120"/>
                         </a:rPr>
-                        <a:t>A rule that numbers follow again and again.</a:t>
+                        <a:t>A way to compare two amounts.</a:t>
                       </a:r>
                       <a:pPr indent="0" marL="0">
                         <a:buNone/>
@@ -19851,7 +19807,7 @@
                           <a:ea typeface="Hanken Grotesk" pitchFamily="34" charset="-122"/>
                           <a:cs typeface="Hanken Grotesk" pitchFamily="34" charset="-120"/>
                         </a:rPr>
-                        <a:t>Una regla que los números siguen una y otra vez.</a:t>
+                        <a:t>Una manera de comparar dos cantidades.</a:t>
                       </a:r>
                       <a:endParaRPr lang="en-US" sz="900" dirty="0">
                         <a:latin typeface="Hanken Grotesk" charset="0"/>
@@ -19919,7 +19875,7 @@
                           <a:ea typeface="Hanken Grotesk" pitchFamily="34" charset="-122"/>
                           <a:cs typeface="Hanken Grotesk" pitchFamily="34" charset="-120"/>
                         </a:rPr>
-                        <a:t>Each row adds 2 cups juice and 3 cups water</a:t>
+                        <a:t>5 to 3 or 5:3</a:t>
                       </a:r>
                       <a:endParaRPr lang="en-US" sz="900" dirty="0">
                         <a:latin typeface="Hanken Grotesk" charset="0"/>
@@ -19989,7 +19945,7 @@
                           <a:ea typeface="Hanken Grotesk" pitchFamily="34" charset="-122"/>
                           <a:cs typeface="Hanken Grotesk" pitchFamily="34" charset="-120"/>
                         </a:rPr>
-                        <a:t>Additive pattern</a:t>
+                        <a:t>Better Buy</a:t>
                       </a:r>
                       <a:pPr indent="0" marL="0">
                         <a:buNone/>
@@ -20013,7 +19969,7 @@
                           <a:ea typeface="Hanken Grotesk" pitchFamily="34" charset="-122"/>
                           <a:cs typeface="Hanken Grotesk" pitchFamily="34" charset="-120"/>
                         </a:rPr>
-                        <a:t>Patrón aditivo</a:t>
+                        <a:t>Mejor compra</a:t>
                       </a:r>
                       <a:endParaRPr lang="en-US" sz="950" dirty="0">
                         <a:latin typeface="Hanken Grotesk" charset="0"/>
@@ -20081,7 +20037,7 @@
                           <a:ea typeface="Hanken Grotesk" pitchFamily="34" charset="-122"/>
                           <a:cs typeface="Hanken Grotesk" pitchFamily="34" charset="-120"/>
                         </a:rPr>
-                        <a:t>Adding the same amount to both parts of a ratio table to make new rows.</a:t>
+                        <a:t>The choice that costs less for each item.</a:t>
                       </a:r>
                       <a:pPr indent="0" marL="0">
                         <a:buNone/>
@@ -20105,7 +20061,7 @@
                           <a:ea typeface="Hanken Grotesk" pitchFamily="34" charset="-122"/>
                           <a:cs typeface="Hanken Grotesk" pitchFamily="34" charset="-120"/>
                         </a:rPr>
-                        <a:t>Sumar la misma cantidad a ambas partes de una tabla de razones para hacer filas nuevas.</a:t>
+                        <a:t>La opción que cuesta menos por cada artículo.</a:t>
                       </a:r>
                       <a:endParaRPr lang="en-US" sz="900" dirty="0">
                         <a:latin typeface="Hanken Grotesk" charset="0"/>
@@ -20173,7 +20129,7 @@
                           <a:ea typeface="Hanken Grotesk" pitchFamily="34" charset="-122"/>
                           <a:cs typeface="Hanken Grotesk" pitchFamily="34" charset="-120"/>
                         </a:rPr>
-                        <a:t>2:3 → 4:6 → 6:9 (add 2 and 3 each time)</a:t>
+                        <a:t>Pack A: $0.50 per pencil vs Pack B: $0.40 per pencil — Pack B is the better buy</a:t>
                       </a:r>
                       <a:endParaRPr lang="en-US" sz="900" dirty="0">
                         <a:latin typeface="Hanken Grotesk" charset="0"/>
@@ -20229,6 +20185,247 @@
           </a:graphicData>
         </a:graphic>
       </p:graphicFrame>
+      <p:sp>
+        <p:nvSpPr>
+          <p:cNvPr id="18" name="Text 15"/>
+          <p:cNvSpPr/>
+          <p:nvPr/>
+        </p:nvSpPr>
+        <p:spPr>
+          <a:xfrm>
+            <a:off x="411480" y="3520440"/>
+            <a:ext cx="8412480" cy="237744"/>
+          </a:xfrm>
+          <a:prstGeom prst="rect">
+            <a:avLst/>
+          </a:prstGeom>
+          <a:noFill/>
+          <a:ln/>
+        </p:spPr>
+        <p:txBody>
+          <a:bodyPr wrap="square" rtlCol="0" anchor="ctr"/>
+          <a:lstStyle/>
+          <a:p>
+            <a:pPr indent="0" marL="0">
+              <a:buNone/>
+            </a:pPr>
+            <a:r>
+              <a:rPr lang="en-US" sz="950" b="1" dirty="0">
+                <a:solidFill>
+                  <a:srgbClr val="17324D"/>
+                </a:solidFill>
+                <a:latin typeface="Outfit" pitchFamily="34" charset="0"/>
+                <a:ea typeface="Outfit" pitchFamily="34" charset="-122"/>
+                <a:cs typeface="Outfit" pitchFamily="34" charset="-120"/>
+              </a:rPr>
+              <a:t>Unit Rate — example vs. non-example:</a:t>
+            </a:r>
+            <a:endParaRPr lang="en-US" sz="950" dirty="0"/>
+          </a:p>
+        </p:txBody>
+      </p:sp>
+      <p:sp>
+        <p:nvSpPr>
+          <p:cNvPr id="19" name="Shape 16"/>
+          <p:cNvSpPr/>
+          <p:nvPr/>
+        </p:nvSpPr>
+        <p:spPr>
+          <a:xfrm>
+            <a:off x="411480" y="3813048"/>
+            <a:ext cx="4114800" cy="457200"/>
+          </a:xfrm>
+          <a:prstGeom prst="roundRect">
+            <a:avLst>
+              <a:gd name="adj" fmla="val 10000"/>
+            </a:avLst>
+          </a:prstGeom>
+          <a:solidFill>
+            <a:srgbClr val="E7F6F4"/>
+          </a:solidFill>
+          <a:ln w="12700">
+            <a:solidFill>
+              <a:srgbClr val="1FA6A2"/>
+            </a:solidFill>
+            <a:prstDash val="solid"/>
+          </a:ln>
+          <a:effectLst>
+            <a:outerShdw sx="100000" sy="100000" kx="0" ky="0" algn="bl" rotWithShape="0" blurRad="50800" dist="12700" dir="5400000">
+              <a:srgbClr val="1C2E42">
+                <a:alpha val="10000"/>
+              </a:srgbClr>
+            </a:outerShdw>
+          </a:effectLst>
+        </p:spPr>
+      </p:sp>
+      <p:sp>
+        <p:nvSpPr>
+          <p:cNvPr id="20" name="Text 17"/>
+          <p:cNvSpPr/>
+          <p:nvPr/>
+        </p:nvSpPr>
+        <p:spPr>
+          <a:xfrm>
+            <a:off x="521208" y="3813048"/>
+            <a:ext cx="3895344" cy="457200"/>
+          </a:xfrm>
+          <a:prstGeom prst="rect">
+            <a:avLst/>
+          </a:prstGeom>
+          <a:noFill/>
+          <a:ln/>
+        </p:spPr>
+        <p:txBody>
+          <a:bodyPr wrap="square" rtlCol="0" anchor="ctr"/>
+          <a:lstStyle/>
+          <a:p>
+            <a:pPr indent="0" marL="0">
+              <a:buNone/>
+            </a:pPr>
+            <a:r>
+              <a:rPr lang="en-US" sz="900" b="1" dirty="0">
+                <a:solidFill>
+                  <a:srgbClr val="1FA6A2"/>
+                </a:solidFill>
+                <a:latin typeface="Hanken Grotesk" pitchFamily="34" charset="0"/>
+                <a:ea typeface="Hanken Grotesk" pitchFamily="34" charset="-122"/>
+                <a:cs typeface="Hanken Grotesk" pitchFamily="34" charset="-120"/>
+              </a:rPr>
+              <a:t>✓ </a:t>
+            </a:r>
+            <a:pPr indent="0" marL="0">
+              <a:buNone/>
+            </a:pPr>
+            <a:r>
+              <a:rPr lang="en-US" sz="900" b="1" dirty="0">
+                <a:solidFill>
+                  <a:srgbClr val="17324D"/>
+                </a:solidFill>
+                <a:latin typeface="Hanken Grotesk" pitchFamily="34" charset="0"/>
+                <a:ea typeface="Hanken Grotesk" pitchFamily="34" charset="-122"/>
+                <a:cs typeface="Hanken Grotesk" pitchFamily="34" charset="-120"/>
+              </a:rPr>
+              <a:t>$2 per 1 pound  </a:t>
+            </a:r>
+            <a:pPr indent="0" marL="0">
+              <a:buNone/>
+            </a:pPr>
+            <a:r>
+              <a:rPr lang="en-US" sz="800" dirty="0">
+                <a:solidFill>
+                  <a:srgbClr val="24323F"/>
+                </a:solidFill>
+                <a:latin typeface="Hanken Grotesk" pitchFamily="34" charset="0"/>
+                <a:ea typeface="Hanken Grotesk" pitchFamily="34" charset="-122"/>
+                <a:cs typeface="Hanken Grotesk" pitchFamily="34" charset="-120"/>
+              </a:rPr>
+              <a:t>It gives the amount for exactly one unit.</a:t>
+            </a:r>
+            <a:endParaRPr lang="en-US" sz="900" dirty="0"/>
+          </a:p>
+        </p:txBody>
+      </p:sp>
+      <p:sp>
+        <p:nvSpPr>
+          <p:cNvPr id="21" name="Shape 18"/>
+          <p:cNvSpPr/>
+          <p:nvPr/>
+        </p:nvSpPr>
+        <p:spPr>
+          <a:xfrm>
+            <a:off x="4663440" y="3813048"/>
+            <a:ext cx="4114800" cy="457200"/>
+          </a:xfrm>
+          <a:prstGeom prst="roundRect">
+            <a:avLst>
+              <a:gd name="adj" fmla="val 10000"/>
+            </a:avLst>
+          </a:prstGeom>
+          <a:solidFill>
+            <a:srgbClr val="FDECEA"/>
+          </a:solidFill>
+          <a:ln w="12700">
+            <a:solidFill>
+              <a:srgbClr val="E2A39B"/>
+            </a:solidFill>
+            <a:prstDash val="solid"/>
+          </a:ln>
+          <a:effectLst>
+            <a:outerShdw sx="100000" sy="100000" kx="0" ky="0" algn="bl" rotWithShape="0" blurRad="50800" dist="12700" dir="5400000">
+              <a:srgbClr val="1C2E42">
+                <a:alpha val="10000"/>
+              </a:srgbClr>
+            </a:outerShdw>
+          </a:effectLst>
+        </p:spPr>
+      </p:sp>
+      <p:sp>
+        <p:nvSpPr>
+          <p:cNvPr id="22" name="Text 19"/>
+          <p:cNvSpPr/>
+          <p:nvPr/>
+        </p:nvSpPr>
+        <p:spPr>
+          <a:xfrm>
+            <a:off x="4773168" y="3813048"/>
+            <a:ext cx="3895344" cy="457200"/>
+          </a:xfrm>
+          <a:prstGeom prst="rect">
+            <a:avLst/>
+          </a:prstGeom>
+          <a:noFill/>
+          <a:ln/>
+        </p:spPr>
+        <p:txBody>
+          <a:bodyPr wrap="square" rtlCol="0" anchor="ctr"/>
+          <a:lstStyle/>
+          <a:p>
+            <a:pPr indent="0" marL="0">
+              <a:buNone/>
+            </a:pPr>
+            <a:r>
+              <a:rPr lang="en-US" sz="900" b="1" dirty="0">
+                <a:solidFill>
+                  <a:srgbClr val="C0392B"/>
+                </a:solidFill>
+                <a:latin typeface="Hanken Grotesk" pitchFamily="34" charset="0"/>
+                <a:ea typeface="Hanken Grotesk" pitchFamily="34" charset="-122"/>
+                <a:cs typeface="Hanken Grotesk" pitchFamily="34" charset="-120"/>
+              </a:rPr>
+              <a:t>✗ </a:t>
+            </a:r>
+            <a:pPr indent="0" marL="0">
+              <a:buNone/>
+            </a:pPr>
+            <a:r>
+              <a:rPr lang="en-US" sz="900" b="1" dirty="0">
+                <a:solidFill>
+                  <a:srgbClr val="17324D"/>
+                </a:solidFill>
+                <a:latin typeface="Hanken Grotesk" pitchFamily="34" charset="0"/>
+                <a:ea typeface="Hanken Grotesk" pitchFamily="34" charset="-122"/>
+                <a:cs typeface="Hanken Grotesk" pitchFamily="34" charset="-120"/>
+              </a:rPr>
+              <a:t>$6 for 3 pounds  </a:t>
+            </a:r>
+            <a:pPr indent="0" marL="0">
+              <a:buNone/>
+            </a:pPr>
+            <a:r>
+              <a:rPr lang="en-US" sz="800" dirty="0">
+                <a:solidFill>
+                  <a:srgbClr val="24323F"/>
+                </a:solidFill>
+                <a:latin typeface="Hanken Grotesk" pitchFamily="34" charset="0"/>
+                <a:ea typeface="Hanken Grotesk" pitchFamily="34" charset="-122"/>
+                <a:cs typeface="Hanken Grotesk" pitchFamily="34" charset="-120"/>
+              </a:rPr>
+              <a:t>That is a rate for 3 units, not a unit rate.</a:t>
+            </a:r>
+            <a:endParaRPr lang="en-US" sz="900" dirty="0"/>
+          </a:p>
+        </p:txBody>
+      </p:sp>
     </p:spTree>
   </p:cSld>
   <p:clrMapOvr>
@@ -20376,7 +20573,7 @@
             </a:avLst>
           </a:prstGeom>
           <a:solidFill>
-            <a:srgbClr val="C0654A"/>
+            <a:srgbClr val="B0883B"/>
           </a:solidFill>
           <a:ln/>
         </p:spPr>
@@ -20396,7 +20593,7 @@
                 <a:ea typeface="Outfit" pitchFamily="34" charset="-122"/>
                 <a:cs typeface="Outfit" pitchFamily="34" charset="-120"/>
               </a:rPr>
-              <a:t>6.AT.3a</a:t>
+              <a:t>6.AT.2</a:t>
             </a:r>
             <a:endParaRPr lang="en-US" sz="900" dirty="0"/>
           </a:p>
@@ -20615,7 +20812,7 @@
                 <a:ea typeface="Hanken Grotesk" pitchFamily="34" charset="-122"/>
                 <a:cs typeface="Hanken Grotesk" pitchFamily="34" charset="-120"/>
               </a:rPr>
-              <a:t>Reveal Math Grade 6  ·  Unit 3  ·  Lesson 3-2</a:t>
+              <a:t>Reveal Math Grade 6  ·  Unit 4  ·  Lesson 4-1</a:t>
             </a:r>
             <a:endParaRPr lang="en-US" sz="750" dirty="0"/>
           </a:p>
@@ -20711,7 +20908,7 @@
             </a:avLst>
           </a:prstGeom>
           <a:solidFill>
-            <a:srgbClr val="C0654A"/>
+            <a:srgbClr val="B0883B"/>
           </a:solidFill>
           <a:ln/>
         </p:spPr>
@@ -20770,7 +20967,7 @@
                 <a:ea typeface="Outfit" pitchFamily="34" charset="-122"/>
                 <a:cs typeface="Outfit" pitchFamily="34" charset="-120"/>
               </a:rPr>
-              <a:t>How do ratio tables work?</a:t>
+              <a:t>What is a unit rate, and how does it help me find the better buy?</a:t>
             </a:r>
             <a:endParaRPr lang="en-US" sz="1200" dirty="0"/>
           </a:p>
@@ -20791,7 +20988,7 @@
             <a:avLst/>
           </a:prstGeom>
           <a:solidFill>
-            <a:srgbClr val="C0654A"/>
+            <a:srgbClr val="B0883B"/>
           </a:solidFill>
           <a:ln/>
         </p:spPr>
@@ -20868,7 +21065,7 @@
                 <a:ea typeface="Hanken Grotesk" pitchFamily="34" charset="-122"/>
                 <a:cs typeface="Hanken Grotesk" pitchFamily="34" charset="-120"/>
               </a:rPr>
-              <a:t>A drink uses 1 cup of juice for every 4 cups of water, so the ratio is 1:4.</a:t>
+              <a:t>A booth charges $4 for 8 games. What do we divide?</a:t>
             </a:r>
             <a:endParaRPr lang="en-US" sz="1050" dirty="0"/>
           </a:p>
@@ -20889,7 +21086,7 @@
             <a:avLst/>
           </a:prstGeom>
           <a:solidFill>
-            <a:srgbClr val="C0654A"/>
+            <a:srgbClr val="B0883B"/>
           </a:solidFill>
           <a:ln/>
         </p:spPr>
@@ -20966,7 +21163,7 @@
                 <a:ea typeface="Hanken Grotesk" pitchFamily="34" charset="-122"/>
                 <a:cs typeface="Hanken Grotesk" pitchFamily="34" charset="-120"/>
               </a:rPr>
-              <a:t>To double it, what scale factor do we use? We use 2.</a:t>
+              <a:t>We divide cost by games: $4 ÷ 8 = ?</a:t>
             </a:r>
             <a:endParaRPr lang="en-US" sz="1050" dirty="0"/>
           </a:p>
@@ -20987,7 +21184,7 @@
             <a:avLst/>
           </a:prstGeom>
           <a:solidFill>
-            <a:srgbClr val="C0654A"/>
+            <a:srgbClr val="B0883B"/>
           </a:solidFill>
           <a:ln/>
         </p:spPr>
@@ -21064,7 +21261,7 @@
                 <a:ea typeface="Hanken Grotesk" pitchFamily="34" charset="-122"/>
                 <a:cs typeface="Hanken Grotesk" pitchFamily="34" charset="-120"/>
               </a:rPr>
-              <a:t>Multiply both by 2: 1 x 2 = 2 cups of juice and 4 x 2 = 8 cups of water, giving 2:8.</a:t>
+              <a:t>What is the cost for just 1 game? ($0.50 per game.)</a:t>
             </a:r>
             <a:endParaRPr lang="en-US" sz="1050" dirty="0"/>
           </a:p>
@@ -21240,7 +21437,7 @@
                 <a:ea typeface="Hanken Grotesk" pitchFamily="34" charset="-122"/>
                 <a:cs typeface="Hanken Grotesk" pitchFamily="34" charset="-120"/>
               </a:rPr>
-              <a:t>Chef Reyes's pancake batter uses 2 cups of mix for every 3 cups of milk. To feed 4 times as many people, what happens to BOTH ingredient amounts?</a:t>
+              <a:t>Booth A charges $3 for 5 games and Booth B charges $5 for 8 games. Just by looking, which booth seems like the better deal, and what makes it hard to be sure?</a:t>
             </a:r>
             <a:endParaRPr lang="en-US" sz="1000" dirty="0"/>
           </a:p>
@@ -21307,7 +21504,7 @@
             <a:r>
               <a:rPr lang="en-US" sz="950" b="1" dirty="0">
                 <a:solidFill>
-                  <a:srgbClr val="C0654A"/>
+                  <a:srgbClr val="B0883B"/>
                 </a:solidFill>
                 <a:latin typeface="Outfit" pitchFamily="34" charset="0"/>
                 <a:ea typeface="Outfit" pitchFamily="34" charset="-122"/>
@@ -21352,7 +21549,7 @@
                 <a:ea typeface="Hanken Grotesk" pitchFamily="34" charset="-122"/>
                 <a:cs typeface="Hanken Grotesk" pitchFamily="34" charset="-120"/>
               </a:rPr>
-              <a:t>To keep a ratio the same, multiply both numbers by the same scale factor.</a:t>
+              <a:t>To find a unit rate, divide the total cost by the number of items. The lower cost per item is the better buy.</a:t>
             </a:r>
             <a:endParaRPr lang="en-US" sz="950" dirty="0"/>
           </a:p>
